--- a/site/slides/Week8.pptx
+++ b/site/slides/Week8.pptx
@@ -57,6 +57,9 @@
     <p:embeddedFont>
       <p:font typeface="Roboto Mono" panose="00000009000000000000" pitchFamily="49" charset="0"/>
       <p:regular r:id="rId43"/>
+      <p:bold r:id="rId44"/>
+      <p:italic r:id="rId45"/>
+      <p:boldItalic r:id="rId46"/>
     </p:embeddedFont>
   </p:embeddedFontLst>
   <p:defaultTextStyle>
@@ -220,7 +223,7 @@
 <file path=ppt/revisionInfo.xml><?xml version="1.0" encoding="utf-8"?>
 <p1510:revInfo xmlns:a="http://schemas.openxmlformats.org/drawingml/2006/main" xmlns:r="http://schemas.openxmlformats.org/officeDocument/2006/relationships" xmlns:p1510="http://schemas.microsoft.com/office/powerpoint/2015/10/main">
   <p1510:revLst>
-    <p1510:client id="{EF0F8122-2A99-46AF-84FE-759F79AED839}" v="199" dt="2025-03-11T01:45:44.014"/>
+    <p1510:client id="{FB64B35A-F5B0-460B-9CE9-134534DC67D7}" v="21" dt="2026-03-10T01:42:07.535"/>
   </p1510:revLst>
 </p1510:revInfo>
 </file>
@@ -228,26 +231,296 @@
 <file path=ppt/changesInfos/changesInfo1.xml><?xml version="1.0" encoding="utf-8"?>
 <pc:chgInfo xmlns:a="http://schemas.openxmlformats.org/drawingml/2006/main" xmlns:r="http://schemas.openxmlformats.org/officeDocument/2006/relationships" xmlns:ac="http://schemas.microsoft.com/office/drawing/2013/main/command" xmlns:pc="http://schemas.microsoft.com/office/powerpoint/2013/main/command">
   <pc:docChgLst>
-    <pc:chgData name="Zhao Jin" userId="cd05a825-544c-438a-9ba1-08e63db50b47" providerId="ADAL" clId="{EF0F8122-2A99-46AF-84FE-759F79AED839}"/>
-    <pc:docChg chg="modSld">
-      <pc:chgData name="Zhao Jin" userId="cd05a825-544c-438a-9ba1-08e63db50b47" providerId="ADAL" clId="{EF0F8122-2A99-46AF-84FE-759F79AED839}" dt="2025-03-11T03:45:14.890" v="1" actId="207"/>
+    <pc:chgData name="Zhao Jin" userId="cd05a825-544c-438a-9ba1-08e63db50b47" providerId="ADAL" clId="{5DF3A229-1965-414E-AF54-F4C37AC7DF68}"/>
+    <pc:docChg chg="undo custSel addSld delSld modSld">
+      <pc:chgData name="Zhao Jin" userId="cd05a825-544c-438a-9ba1-08e63db50b47" providerId="ADAL" clId="{5DF3A229-1965-414E-AF54-F4C37AC7DF68}" dt="2026-03-10T04:59:27.792" v="360" actId="20577"/>
       <pc:docMkLst>
         <pc:docMk/>
       </pc:docMkLst>
       <pc:sldChg chg="modSp mod">
-        <pc:chgData name="Zhao Jin" userId="cd05a825-544c-438a-9ba1-08e63db50b47" providerId="ADAL" clId="{EF0F8122-2A99-46AF-84FE-759F79AED839}" dt="2025-03-11T03:45:14.890" v="1" actId="207"/>
+        <pc:chgData name="Zhao Jin" userId="cd05a825-544c-438a-9ba1-08e63db50b47" providerId="ADAL" clId="{5DF3A229-1965-414E-AF54-F4C37AC7DF68}" dt="2026-03-09T08:45:52.997" v="198" actId="20577"/>
         <pc:sldMkLst>
           <pc:docMk/>
-          <pc:sldMk cId="2302386698" sldId="664"/>
+          <pc:sldMk cId="1067695719" sldId="526"/>
         </pc:sldMkLst>
         <pc:spChg chg="mod">
-          <ac:chgData name="Zhao Jin" userId="cd05a825-544c-438a-9ba1-08e63db50b47" providerId="ADAL" clId="{EF0F8122-2A99-46AF-84FE-759F79AED839}" dt="2025-03-11T03:45:14.890" v="1" actId="207"/>
+          <ac:chgData name="Zhao Jin" userId="cd05a825-544c-438a-9ba1-08e63db50b47" providerId="ADAL" clId="{5DF3A229-1965-414E-AF54-F4C37AC7DF68}" dt="2026-03-09T08:45:52.997" v="198" actId="20577"/>
           <ac:spMkLst>
             <pc:docMk/>
-            <pc:sldMk cId="2302386698" sldId="664"/>
-            <ac:spMk id="24" creationId="{B4BDD4AD-A136-42CF-A595-B7C410B32541}"/>
+            <pc:sldMk cId="1067695719" sldId="526"/>
+            <ac:spMk id="13" creationId="{00000000-0000-0000-0000-000000000000}"/>
           </ac:spMkLst>
         </pc:spChg>
+      </pc:sldChg>
+      <pc:sldChg chg="modSp mod">
+        <pc:chgData name="Zhao Jin" userId="cd05a825-544c-438a-9ba1-08e63db50b47" providerId="ADAL" clId="{5DF3A229-1965-414E-AF54-F4C37AC7DF68}" dt="2026-03-10T01:39:43.821" v="325" actId="207"/>
+        <pc:sldMkLst>
+          <pc:docMk/>
+          <pc:sldMk cId="211149325" sldId="589"/>
+        </pc:sldMkLst>
+        <pc:spChg chg="mod">
+          <ac:chgData name="Zhao Jin" userId="cd05a825-544c-438a-9ba1-08e63db50b47" providerId="ADAL" clId="{5DF3A229-1965-414E-AF54-F4C37AC7DF68}" dt="2026-03-10T01:39:43.821" v="325" actId="207"/>
+          <ac:spMkLst>
+            <pc:docMk/>
+            <pc:sldMk cId="211149325" sldId="589"/>
+            <ac:spMk id="16" creationId="{B7DEE2E2-F891-4A97-9D9A-03DE9B53CC3F}"/>
+          </ac:spMkLst>
+        </pc:spChg>
+      </pc:sldChg>
+      <pc:sldChg chg="addAnim delAnim modAnim">
+        <pc:chgData name="Zhao Jin" userId="cd05a825-544c-438a-9ba1-08e63db50b47" providerId="ADAL" clId="{5DF3A229-1965-414E-AF54-F4C37AC7DF68}" dt="2026-03-10T01:42:07.535" v="344"/>
+        <pc:sldMkLst>
+          <pc:docMk/>
+          <pc:sldMk cId="567798019" sldId="591"/>
+        </pc:sldMkLst>
+      </pc:sldChg>
+      <pc:sldChg chg="modSp mod">
+        <pc:chgData name="Zhao Jin" userId="cd05a825-544c-438a-9ba1-08e63db50b47" providerId="ADAL" clId="{5DF3A229-1965-414E-AF54-F4C37AC7DF68}" dt="2026-03-10T01:40:34.958" v="326" actId="207"/>
+        <pc:sldMkLst>
+          <pc:docMk/>
+          <pc:sldMk cId="3128770740" sldId="605"/>
+        </pc:sldMkLst>
+        <pc:spChg chg="mod">
+          <ac:chgData name="Zhao Jin" userId="cd05a825-544c-438a-9ba1-08e63db50b47" providerId="ADAL" clId="{5DF3A229-1965-414E-AF54-F4C37AC7DF68}" dt="2026-03-10T01:40:34.958" v="326" actId="207"/>
+          <ac:spMkLst>
+            <pc:docMk/>
+            <pc:sldMk cId="3128770740" sldId="605"/>
+            <ac:spMk id="18" creationId="{51C45FE8-2367-4E16-BDC9-E17F9CDDA908}"/>
+          </ac:spMkLst>
+        </pc:spChg>
+      </pc:sldChg>
+      <pc:sldChg chg="delSp modSp mod delAnim">
+        <pc:chgData name="Zhao Jin" userId="cd05a825-544c-438a-9ba1-08e63db50b47" providerId="ADAL" clId="{5DF3A229-1965-414E-AF54-F4C37AC7DF68}" dt="2026-03-09T09:34:46.701" v="320" actId="20577"/>
+        <pc:sldMkLst>
+          <pc:docMk/>
+          <pc:sldMk cId="3198546536" sldId="607"/>
+        </pc:sldMkLst>
+        <pc:spChg chg="del">
+          <ac:chgData name="Zhao Jin" userId="cd05a825-544c-438a-9ba1-08e63db50b47" providerId="ADAL" clId="{5DF3A229-1965-414E-AF54-F4C37AC7DF68}" dt="2026-03-09T08:35:21.023" v="126" actId="478"/>
+          <ac:spMkLst>
+            <pc:docMk/>
+            <pc:sldMk cId="3198546536" sldId="607"/>
+            <ac:spMk id="7" creationId="{0D56054E-DA22-A52C-0CF2-5A1432E2837D}"/>
+          </ac:spMkLst>
+        </pc:spChg>
+        <pc:spChg chg="del">
+          <ac:chgData name="Zhao Jin" userId="cd05a825-544c-438a-9ba1-08e63db50b47" providerId="ADAL" clId="{5DF3A229-1965-414E-AF54-F4C37AC7DF68}" dt="2026-03-09T08:35:21.023" v="126" actId="478"/>
+          <ac:spMkLst>
+            <pc:docMk/>
+            <pc:sldMk cId="3198546536" sldId="607"/>
+            <ac:spMk id="8" creationId="{3DA94227-8FEE-E8C9-57AC-1AFDCA8DC7CA}"/>
+          </ac:spMkLst>
+        </pc:spChg>
+        <pc:spChg chg="mod">
+          <ac:chgData name="Zhao Jin" userId="cd05a825-544c-438a-9ba1-08e63db50b47" providerId="ADAL" clId="{5DF3A229-1965-414E-AF54-F4C37AC7DF68}" dt="2026-03-09T09:34:46.701" v="320" actId="20577"/>
+          <ac:spMkLst>
+            <pc:docMk/>
+            <pc:sldMk cId="3198546536" sldId="607"/>
+            <ac:spMk id="9" creationId="{95E0A7A2-7048-3046-510D-F4506CAD5BAA}"/>
+          </ac:spMkLst>
+        </pc:spChg>
+        <pc:spChg chg="del">
+          <ac:chgData name="Zhao Jin" userId="cd05a825-544c-438a-9ba1-08e63db50b47" providerId="ADAL" clId="{5DF3A229-1965-414E-AF54-F4C37AC7DF68}" dt="2026-03-09T08:35:21.023" v="126" actId="478"/>
+          <ac:spMkLst>
+            <pc:docMk/>
+            <pc:sldMk cId="3198546536" sldId="607"/>
+            <ac:spMk id="10" creationId="{255908BD-4F2C-E1B4-0FB2-B2F0E5A12B86}"/>
+          </ac:spMkLst>
+        </pc:spChg>
+        <pc:spChg chg="del">
+          <ac:chgData name="Zhao Jin" userId="cd05a825-544c-438a-9ba1-08e63db50b47" providerId="ADAL" clId="{5DF3A229-1965-414E-AF54-F4C37AC7DF68}" dt="2026-03-09T08:35:21.023" v="126" actId="478"/>
+          <ac:spMkLst>
+            <pc:docMk/>
+            <pc:sldMk cId="3198546536" sldId="607"/>
+            <ac:spMk id="11" creationId="{ADC68951-983D-1AA5-1613-48A5A3F051EA}"/>
+          </ac:spMkLst>
+        </pc:spChg>
+        <pc:spChg chg="del">
+          <ac:chgData name="Zhao Jin" userId="cd05a825-544c-438a-9ba1-08e63db50b47" providerId="ADAL" clId="{5DF3A229-1965-414E-AF54-F4C37AC7DF68}" dt="2026-03-09T08:35:21.023" v="126" actId="478"/>
+          <ac:spMkLst>
+            <pc:docMk/>
+            <pc:sldMk cId="3198546536" sldId="607"/>
+            <ac:spMk id="12" creationId="{5E7E47A8-8BCD-3DB3-55FE-F88BB2573BC2}"/>
+          </ac:spMkLst>
+        </pc:spChg>
+        <pc:spChg chg="del">
+          <ac:chgData name="Zhao Jin" userId="cd05a825-544c-438a-9ba1-08e63db50b47" providerId="ADAL" clId="{5DF3A229-1965-414E-AF54-F4C37AC7DF68}" dt="2026-03-09T08:35:21.023" v="126" actId="478"/>
+          <ac:spMkLst>
+            <pc:docMk/>
+            <pc:sldMk cId="3198546536" sldId="607"/>
+            <ac:spMk id="13" creationId="{74CC3C61-AA56-CCBD-5E4B-2353A3E3B9B5}"/>
+          </ac:spMkLst>
+        </pc:spChg>
+        <pc:picChg chg="del">
+          <ac:chgData name="Zhao Jin" userId="cd05a825-544c-438a-9ba1-08e63db50b47" providerId="ADAL" clId="{5DF3A229-1965-414E-AF54-F4C37AC7DF68}" dt="2026-03-09T08:35:21.023" v="126" actId="478"/>
+          <ac:picMkLst>
+            <pc:docMk/>
+            <pc:sldMk cId="3198546536" sldId="607"/>
+            <ac:picMk id="4" creationId="{281A4FD2-E4F1-724D-CF79-C79F01B7193B}"/>
+          </ac:picMkLst>
+        </pc:picChg>
+        <pc:cxnChg chg="del">
+          <ac:chgData name="Zhao Jin" userId="cd05a825-544c-438a-9ba1-08e63db50b47" providerId="ADAL" clId="{5DF3A229-1965-414E-AF54-F4C37AC7DF68}" dt="2026-03-09T08:35:21.023" v="126" actId="478"/>
+          <ac:cxnSpMkLst>
+            <pc:docMk/>
+            <pc:sldMk cId="3198546536" sldId="607"/>
+            <ac:cxnSpMk id="5" creationId="{344D6F7F-4CC8-AB06-D390-91110966AB98}"/>
+          </ac:cxnSpMkLst>
+        </pc:cxnChg>
+        <pc:cxnChg chg="del">
+          <ac:chgData name="Zhao Jin" userId="cd05a825-544c-438a-9ba1-08e63db50b47" providerId="ADAL" clId="{5DF3A229-1965-414E-AF54-F4C37AC7DF68}" dt="2026-03-09T08:35:21.023" v="126" actId="478"/>
+          <ac:cxnSpMkLst>
+            <pc:docMk/>
+            <pc:sldMk cId="3198546536" sldId="607"/>
+            <ac:cxnSpMk id="6" creationId="{836A0946-6084-2F1F-4193-8A73209E63DA}"/>
+          </ac:cxnSpMkLst>
+        </pc:cxnChg>
+      </pc:sldChg>
+      <pc:sldChg chg="addSp delSp modSp mod addAnim delAnim modAnim">
+        <pc:chgData name="Zhao Jin" userId="cd05a825-544c-438a-9ba1-08e63db50b47" providerId="ADAL" clId="{5DF3A229-1965-414E-AF54-F4C37AC7DF68}" dt="2026-03-09T08:34:53.277" v="123"/>
+        <pc:sldMkLst>
+          <pc:docMk/>
+          <pc:sldMk cId="190401359" sldId="608"/>
+        </pc:sldMkLst>
+        <pc:spChg chg="mod ord">
+          <ac:chgData name="Zhao Jin" userId="cd05a825-544c-438a-9ba1-08e63db50b47" providerId="ADAL" clId="{5DF3A229-1965-414E-AF54-F4C37AC7DF68}" dt="2026-03-09T08:32:39.109" v="101" actId="166"/>
+          <ac:spMkLst>
+            <pc:docMk/>
+            <pc:sldMk cId="190401359" sldId="608"/>
+            <ac:spMk id="8" creationId="{6733515B-D42E-F316-8552-CEAB2D22C30D}"/>
+          </ac:spMkLst>
+        </pc:spChg>
+        <pc:spChg chg="mod">
+          <ac:chgData name="Zhao Jin" userId="cd05a825-544c-438a-9ba1-08e63db50b47" providerId="ADAL" clId="{5DF3A229-1965-414E-AF54-F4C37AC7DF68}" dt="2026-03-09T08:33:03.529" v="105" actId="20577"/>
+          <ac:spMkLst>
+            <pc:docMk/>
+            <pc:sldMk cId="190401359" sldId="608"/>
+            <ac:spMk id="9" creationId="{269DAB42-C589-5BFA-8DDD-6B3F03E9F33D}"/>
+          </ac:spMkLst>
+        </pc:spChg>
+        <pc:spChg chg="mod">
+          <ac:chgData name="Zhao Jin" userId="cd05a825-544c-438a-9ba1-08e63db50b47" providerId="ADAL" clId="{5DF3A229-1965-414E-AF54-F4C37AC7DF68}" dt="2026-03-09T08:32:06.227" v="39" actId="1076"/>
+          <ac:spMkLst>
+            <pc:docMk/>
+            <pc:sldMk cId="190401359" sldId="608"/>
+            <ac:spMk id="11" creationId="{C47234B5-84FB-6495-7610-BBF77AAF6B3A}"/>
+          </ac:spMkLst>
+        </pc:spChg>
+        <pc:spChg chg="mod">
+          <ac:chgData name="Zhao Jin" userId="cd05a825-544c-438a-9ba1-08e63db50b47" providerId="ADAL" clId="{5DF3A229-1965-414E-AF54-F4C37AC7DF68}" dt="2026-03-09T08:32:56.444" v="103" actId="14100"/>
+          <ac:spMkLst>
+            <pc:docMk/>
+            <pc:sldMk cId="190401359" sldId="608"/>
+            <ac:spMk id="13" creationId="{06F48D8D-2E57-295D-73E8-4A8BF0C9C6BA}"/>
+          </ac:spMkLst>
+        </pc:spChg>
+        <pc:spChg chg="mod">
+          <ac:chgData name="Zhao Jin" userId="cd05a825-544c-438a-9ba1-08e63db50b47" providerId="ADAL" clId="{5DF3A229-1965-414E-AF54-F4C37AC7DF68}" dt="2026-03-09T08:33:08.898" v="113" actId="1036"/>
+          <ac:spMkLst>
+            <pc:docMk/>
+            <pc:sldMk cId="190401359" sldId="608"/>
+            <ac:spMk id="14" creationId="{361A83A8-68AB-9A83-D2FE-2E4D1677F9CC}"/>
+          </ac:spMkLst>
+        </pc:spChg>
+        <pc:picChg chg="add del mod modCrop">
+          <ac:chgData name="Zhao Jin" userId="cd05a825-544c-438a-9ba1-08e63db50b47" providerId="ADAL" clId="{5DF3A229-1965-414E-AF54-F4C37AC7DF68}" dt="2026-03-09T08:31:24.812" v="23" actId="478"/>
+          <ac:picMkLst>
+            <pc:docMk/>
+            <pc:sldMk cId="190401359" sldId="608"/>
+            <ac:picMk id="12" creationId="{82F30AB3-1F39-B4EF-369A-267C46CF370A}"/>
+          </ac:picMkLst>
+        </pc:picChg>
+        <pc:picChg chg="add mod">
+          <ac:chgData name="Zhao Jin" userId="cd05a825-544c-438a-9ba1-08e63db50b47" providerId="ADAL" clId="{5DF3A229-1965-414E-AF54-F4C37AC7DF68}" dt="2026-03-09T08:32:16.609" v="41" actId="14100"/>
+          <ac:picMkLst>
+            <pc:docMk/>
+            <pc:sldMk cId="190401359" sldId="608"/>
+            <ac:picMk id="17" creationId="{D03BB203-7B9C-251C-5440-19A0057655C7}"/>
+          </ac:picMkLst>
+        </pc:picChg>
+        <pc:cxnChg chg="mod ord">
+          <ac:chgData name="Zhao Jin" userId="cd05a825-544c-438a-9ba1-08e63db50b47" providerId="ADAL" clId="{5DF3A229-1965-414E-AF54-F4C37AC7DF68}" dt="2026-03-09T08:32:39.109" v="101" actId="166"/>
+          <ac:cxnSpMkLst>
+            <pc:docMk/>
+            <pc:sldMk cId="190401359" sldId="608"/>
+            <ac:cxnSpMk id="6" creationId="{ADBBD169-819F-8148-242C-B02A7E727B58}"/>
+          </ac:cxnSpMkLst>
+        </pc:cxnChg>
+      </pc:sldChg>
+      <pc:sldChg chg="modSp mod">
+        <pc:chgData name="Zhao Jin" userId="cd05a825-544c-438a-9ba1-08e63db50b47" providerId="ADAL" clId="{5DF3A229-1965-414E-AF54-F4C37AC7DF68}" dt="2026-03-09T08:37:12.387" v="162" actId="14100"/>
+        <pc:sldMkLst>
+          <pc:docMk/>
+          <pc:sldMk cId="3269496185" sldId="645"/>
+        </pc:sldMkLst>
+        <pc:spChg chg="mod">
+          <ac:chgData name="Zhao Jin" userId="cd05a825-544c-438a-9ba1-08e63db50b47" providerId="ADAL" clId="{5DF3A229-1965-414E-AF54-F4C37AC7DF68}" dt="2026-03-09T08:37:05.360" v="160" actId="1038"/>
+          <ac:spMkLst>
+            <pc:docMk/>
+            <pc:sldMk cId="3269496185" sldId="645"/>
+            <ac:spMk id="6" creationId="{0D4907B7-B626-4918-8EBE-E58F980E1F13}"/>
+          </ac:spMkLst>
+        </pc:spChg>
+        <pc:spChg chg="mod">
+          <ac:chgData name="Zhao Jin" userId="cd05a825-544c-438a-9ba1-08e63db50b47" providerId="ADAL" clId="{5DF3A229-1965-414E-AF54-F4C37AC7DF68}" dt="2026-03-09T08:37:12.387" v="162" actId="14100"/>
+          <ac:spMkLst>
+            <pc:docMk/>
+            <pc:sldMk cId="3269496185" sldId="645"/>
+            <ac:spMk id="10" creationId="{53EAFDBE-C17B-4636-95FE-68AA5070A437}"/>
+          </ac:spMkLst>
+        </pc:spChg>
+      </pc:sldChg>
+      <pc:sldChg chg="modSp mod">
+        <pc:chgData name="Zhao Jin" userId="cd05a825-544c-438a-9ba1-08e63db50b47" providerId="ADAL" clId="{5DF3A229-1965-414E-AF54-F4C37AC7DF68}" dt="2026-03-10T04:58:58.219" v="349" actId="207"/>
+        <pc:sldMkLst>
+          <pc:docMk/>
+          <pc:sldMk cId="3772712696" sldId="659"/>
+        </pc:sldMkLst>
+        <pc:spChg chg="mod">
+          <ac:chgData name="Zhao Jin" userId="cd05a825-544c-438a-9ba1-08e63db50b47" providerId="ADAL" clId="{5DF3A229-1965-414E-AF54-F4C37AC7DF68}" dt="2026-03-10T04:58:58.219" v="349" actId="207"/>
+          <ac:spMkLst>
+            <pc:docMk/>
+            <pc:sldMk cId="3772712696" sldId="659"/>
+            <ac:spMk id="11" creationId="{00000000-0000-0000-0000-000000000000}"/>
+          </ac:spMkLst>
+        </pc:spChg>
+      </pc:sldChg>
+      <pc:sldChg chg="modSp mod">
+        <pc:chgData name="Zhao Jin" userId="cd05a825-544c-438a-9ba1-08e63db50b47" providerId="ADAL" clId="{5DF3A229-1965-414E-AF54-F4C37AC7DF68}" dt="2026-03-10T04:59:16.138" v="354" actId="207"/>
+        <pc:sldMkLst>
+          <pc:docMk/>
+          <pc:sldMk cId="783540612" sldId="661"/>
+        </pc:sldMkLst>
+        <pc:spChg chg="mod">
+          <ac:chgData name="Zhao Jin" userId="cd05a825-544c-438a-9ba1-08e63db50b47" providerId="ADAL" clId="{5DF3A229-1965-414E-AF54-F4C37AC7DF68}" dt="2026-03-10T04:59:16.138" v="354" actId="207"/>
+          <ac:spMkLst>
+            <pc:docMk/>
+            <pc:sldMk cId="783540612" sldId="661"/>
+            <ac:spMk id="33" creationId="{00000000-0000-0000-0000-000000000000}"/>
+          </ac:spMkLst>
+        </pc:spChg>
+      </pc:sldChg>
+      <pc:sldChg chg="modSp mod">
+        <pc:chgData name="Zhao Jin" userId="cd05a825-544c-438a-9ba1-08e63db50b47" providerId="ADAL" clId="{5DF3A229-1965-414E-AF54-F4C37AC7DF68}" dt="2026-03-10T04:59:27.792" v="360" actId="20577"/>
+        <pc:sldMkLst>
+          <pc:docMk/>
+          <pc:sldMk cId="1856385546" sldId="662"/>
+        </pc:sldMkLst>
+        <pc:spChg chg="mod">
+          <ac:chgData name="Zhao Jin" userId="cd05a825-544c-438a-9ba1-08e63db50b47" providerId="ADAL" clId="{5DF3A229-1965-414E-AF54-F4C37AC7DF68}" dt="2026-03-10T04:59:27.792" v="360" actId="20577"/>
+          <ac:spMkLst>
+            <pc:docMk/>
+            <pc:sldMk cId="1856385546" sldId="662"/>
+            <ac:spMk id="33" creationId="{00000000-0000-0000-0000-000000000000}"/>
+          </ac:spMkLst>
+        </pc:spChg>
+      </pc:sldChg>
+      <pc:sldChg chg="add del">
+        <pc:chgData name="Zhao Jin" userId="cd05a825-544c-438a-9ba1-08e63db50b47" providerId="ADAL" clId="{5DF3A229-1965-414E-AF54-F4C37AC7DF68}" dt="2026-03-09T08:38:53.420" v="195" actId="47"/>
+        <pc:sldMkLst>
+          <pc:docMk/>
+          <pc:sldMk cId="4000405018" sldId="665"/>
+        </pc:sldMkLst>
       </pc:sldChg>
     </pc:docChg>
   </pc:docChgLst>
@@ -728,7 +1001,7 @@
               <a:pPr>
                 <a:defRPr/>
               </a:pPr>
-              <a:t>3/11/2025</a:t>
+              <a:t>3/10/2026</a:t>
             </a:fld>
             <a:endParaRPr lang="en-US" dirty="0"/>
           </a:p>
@@ -10397,7 +10670,7 @@
             </a:r>
             <a:r>
               <a:rPr lang="en-US" b="1" dirty="0"/>
-              <a:t>4</a:t>
+              <a:t>8</a:t>
             </a:r>
             <a:r>
               <a:rPr lang="en-US" dirty="0"/>
@@ -10442,7 +10715,7 @@
                   <a:srgbClr val="36464E"/>
                 </a:solidFill>
               </a:rPr>
-              <a:t>32</a:t>
+              <a:t>36</a:t>
             </a:r>
             <a:endParaRPr lang="en-US" b="1" dirty="0"/>
           </a:p>
@@ -10819,6 +11092,272 @@
           </a:fontRef>
         </p:style>
       </p:cxnSp>
+      <p:sp>
+        <p:nvSpPr>
+          <p:cNvPr id="7" name="TextBox 6">
+            <a:extLst>
+              <a:ext uri="{FF2B5EF4-FFF2-40B4-BE49-F238E27FC236}">
+                <a16:creationId xmlns:a16="http://schemas.microsoft.com/office/drawing/2014/main" id="{D982FD41-94D7-8EDA-B44E-6A0A396BDEAC}"/>
+              </a:ext>
+            </a:extLst>
+          </p:cNvPr>
+          <p:cNvSpPr txBox="1"/>
+          <p:nvPr/>
+        </p:nvSpPr>
+        <p:spPr>
+          <a:xfrm>
+            <a:off x="2754775" y="6389528"/>
+            <a:ext cx="1730011" cy="369332"/>
+          </a:xfrm>
+          <a:prstGeom prst="rect">
+            <a:avLst/>
+          </a:prstGeom>
+          <a:noFill/>
+        </p:spPr>
+        <p:txBody>
+          <a:bodyPr wrap="square">
+            <a:spAutoFit/>
+          </a:bodyPr>
+          <a:lstStyle/>
+          <a:p>
+            <a:r>
+              <a:rPr lang="en-US" sz="1800" b="0" i="0" dirty="0">
+                <a:solidFill>
+                  <a:srgbClr val="36464E"/>
+                </a:solidFill>
+                <a:effectLst/>
+                <a:latin typeface="+mj-lt"/>
+              </a:rPr>
+              <a:t>256855</a:t>
+            </a:r>
+            <a:r>
+              <a:rPr lang="en-US" sz="1800" b="1" i="0" dirty="0">
+                <a:solidFill>
+                  <a:srgbClr val="36464E"/>
+                </a:solidFill>
+                <a:effectLst/>
+                <a:latin typeface="+mj-lt"/>
+              </a:rPr>
+              <a:t>28</a:t>
+            </a:r>
+            <a:r>
+              <a:rPr lang="en-US" sz="1800" b="0" i="0" dirty="0">
+                <a:solidFill>
+                  <a:srgbClr val="36464E"/>
+                </a:solidFill>
+                <a:effectLst/>
+                <a:latin typeface="+mj-lt"/>
+              </a:rPr>
+              <a:t> (</a:t>
+            </a:r>
+            <a:r>
+              <a:rPr lang="en-US" sz="1800" b="0" i="0" dirty="0" err="1">
+                <a:solidFill>
+                  <a:srgbClr val="36464E"/>
+                </a:solidFill>
+                <a:effectLst/>
+                <a:latin typeface="+mj-lt"/>
+              </a:rPr>
+              <a:t>ptr</a:t>
+            </a:r>
+            <a:r>
+              <a:rPr lang="en-US" sz="1800" b="0" i="0" dirty="0">
+                <a:solidFill>
+                  <a:srgbClr val="36464E"/>
+                </a:solidFill>
+                <a:effectLst/>
+                <a:latin typeface="+mj-lt"/>
+              </a:rPr>
+              <a:t>)</a:t>
+            </a:r>
+          </a:p>
+        </p:txBody>
+      </p:sp>
+      <p:sp>
+        <p:nvSpPr>
+          <p:cNvPr id="10" name="TextBox 9">
+            <a:extLst>
+              <a:ext uri="{FF2B5EF4-FFF2-40B4-BE49-F238E27FC236}">
+                <a16:creationId xmlns:a16="http://schemas.microsoft.com/office/drawing/2014/main" id="{D0EAB353-DA0C-F40F-07F8-FF15B60B59F7}"/>
+              </a:ext>
+            </a:extLst>
+          </p:cNvPr>
+          <p:cNvSpPr txBox="1"/>
+          <p:nvPr/>
+        </p:nvSpPr>
+        <p:spPr>
+          <a:xfrm>
+            <a:off x="3856111" y="5553625"/>
+            <a:ext cx="742384" cy="369332"/>
+          </a:xfrm>
+          <a:prstGeom prst="rect">
+            <a:avLst/>
+          </a:prstGeom>
+          <a:noFill/>
+        </p:spPr>
+        <p:txBody>
+          <a:bodyPr wrap="square" rtlCol="0">
+            <a:spAutoFit/>
+          </a:bodyPr>
+          <a:lstStyle/>
+          <a:p>
+            <a:r>
+              <a:rPr lang="en-US" dirty="0"/>
+              <a:t>…</a:t>
+            </a:r>
+            <a:endParaRPr lang="en-SG" dirty="0"/>
+          </a:p>
+        </p:txBody>
+      </p:sp>
+      <p:sp>
+        <p:nvSpPr>
+          <p:cNvPr id="11" name="TextBox 10">
+            <a:extLst>
+              <a:ext uri="{FF2B5EF4-FFF2-40B4-BE49-F238E27FC236}">
+                <a16:creationId xmlns:a16="http://schemas.microsoft.com/office/drawing/2014/main" id="{C47234B5-84FB-6495-7610-BBF77AAF6B3A}"/>
+              </a:ext>
+            </a:extLst>
+          </p:cNvPr>
+          <p:cNvSpPr txBox="1"/>
+          <p:nvPr/>
+        </p:nvSpPr>
+        <p:spPr>
+          <a:xfrm>
+            <a:off x="7980291" y="5569847"/>
+            <a:ext cx="742384" cy="369332"/>
+          </a:xfrm>
+          <a:prstGeom prst="rect">
+            <a:avLst/>
+          </a:prstGeom>
+          <a:noFill/>
+        </p:spPr>
+        <p:txBody>
+          <a:bodyPr wrap="square" rtlCol="0">
+            <a:spAutoFit/>
+          </a:bodyPr>
+          <a:lstStyle/>
+          <a:p>
+            <a:r>
+              <a:rPr lang="en-US" dirty="0"/>
+              <a:t>…</a:t>
+            </a:r>
+            <a:endParaRPr lang="en-SG" dirty="0"/>
+          </a:p>
+        </p:txBody>
+      </p:sp>
+      <p:sp>
+        <p:nvSpPr>
+          <p:cNvPr id="13" name="Left Brace 12">
+            <a:extLst>
+              <a:ext uri="{FF2B5EF4-FFF2-40B4-BE49-F238E27FC236}">
+                <a16:creationId xmlns:a16="http://schemas.microsoft.com/office/drawing/2014/main" id="{06F48D8D-2E57-295D-73E8-4A8BF0C9C6BA}"/>
+              </a:ext>
+            </a:extLst>
+          </p:cNvPr>
+          <p:cNvSpPr/>
+          <p:nvPr/>
+        </p:nvSpPr>
+        <p:spPr>
+          <a:xfrm rot="5400000">
+            <a:off x="5893455" y="3863275"/>
+            <a:ext cx="235699" cy="3064988"/>
+          </a:xfrm>
+          <a:prstGeom prst="leftBrace">
+            <a:avLst>
+              <a:gd name="adj1" fmla="val 8333"/>
+              <a:gd name="adj2" fmla="val 54472"/>
+            </a:avLst>
+          </a:prstGeom>
+        </p:spPr>
+        <p:style>
+          <a:lnRef idx="1">
+            <a:schemeClr val="accent1"/>
+          </a:lnRef>
+          <a:fillRef idx="0">
+            <a:schemeClr val="accent1"/>
+          </a:fillRef>
+          <a:effectRef idx="0">
+            <a:schemeClr val="accent1"/>
+          </a:effectRef>
+          <a:fontRef idx="minor">
+            <a:schemeClr val="tx1"/>
+          </a:fontRef>
+        </p:style>
+        <p:txBody>
+          <a:bodyPr rtlCol="0" anchor="ctr"/>
+          <a:lstStyle/>
+          <a:p>
+            <a:pPr algn="ctr"/>
+            <a:endParaRPr lang="en-SG"/>
+          </a:p>
+        </p:txBody>
+      </p:sp>
+      <p:sp>
+        <p:nvSpPr>
+          <p:cNvPr id="14" name="TextBox 13">
+            <a:extLst>
+              <a:ext uri="{FF2B5EF4-FFF2-40B4-BE49-F238E27FC236}">
+                <a16:creationId xmlns:a16="http://schemas.microsoft.com/office/drawing/2014/main" id="{361A83A8-68AB-9A83-D2FE-2E4D1677F9CC}"/>
+              </a:ext>
+            </a:extLst>
+          </p:cNvPr>
+          <p:cNvSpPr txBox="1"/>
+          <p:nvPr/>
+        </p:nvSpPr>
+        <p:spPr>
+          <a:xfrm>
+            <a:off x="4746803" y="4921584"/>
+            <a:ext cx="3391357" cy="369332"/>
+          </a:xfrm>
+          <a:prstGeom prst="rect">
+            <a:avLst/>
+          </a:prstGeom>
+          <a:noFill/>
+        </p:spPr>
+        <p:txBody>
+          <a:bodyPr wrap="square" rtlCol="0">
+            <a:spAutoFit/>
+          </a:bodyPr>
+          <a:lstStyle/>
+          <a:p>
+            <a:r>
+              <a:rPr lang="en-US" dirty="0"/>
+              <a:t>8 bytes allocated for x</a:t>
+            </a:r>
+            <a:endParaRPr lang="en-SG" dirty="0"/>
+          </a:p>
+        </p:txBody>
+      </p:sp>
+      <p:pic>
+        <p:nvPicPr>
+          <p:cNvPr id="17" name="Picture 16">
+            <a:extLst>
+              <a:ext uri="{FF2B5EF4-FFF2-40B4-BE49-F238E27FC236}">
+                <a16:creationId xmlns:a16="http://schemas.microsoft.com/office/drawing/2014/main" id="{D03BB203-7B9C-251C-5440-19A0057655C7}"/>
+              </a:ext>
+            </a:extLst>
+          </p:cNvPr>
+          <p:cNvPicPr>
+            <a:picLocks noChangeAspect="1"/>
+          </p:cNvPicPr>
+          <p:nvPr/>
+        </p:nvPicPr>
+        <p:blipFill>
+          <a:blip r:embed="rId4"/>
+          <a:stretch>
+            <a:fillRect/>
+          </a:stretch>
+        </p:blipFill>
+        <p:spPr>
+          <a:xfrm>
+            <a:off x="7595450" y="5526318"/>
+            <a:ext cx="411900" cy="507691"/>
+          </a:xfrm>
+          <a:prstGeom prst="rect">
+            <a:avLst/>
+          </a:prstGeom>
+        </p:spPr>
+      </p:pic>
       <p:cxnSp>
         <p:nvCxnSpPr>
           <p:cNvPr id="6" name="Straight Arrow Connector 5">
@@ -10835,7 +11374,7 @@
         </p:nvCxnSpPr>
         <p:spPr>
           <a:xfrm flipV="1">
-            <a:off x="5324883" y="5806288"/>
+            <a:off x="6848897" y="5806288"/>
             <a:ext cx="932507" cy="552338"/>
           </a:xfrm>
           <a:prstGeom prst="straightConnector1">
@@ -10865,87 +11404,6 @@
       </p:cxnSp>
       <p:sp>
         <p:nvSpPr>
-          <p:cNvPr id="7" name="TextBox 6">
-            <a:extLst>
-              <a:ext uri="{FF2B5EF4-FFF2-40B4-BE49-F238E27FC236}">
-                <a16:creationId xmlns:a16="http://schemas.microsoft.com/office/drawing/2014/main" id="{D982FD41-94D7-8EDA-B44E-6A0A396BDEAC}"/>
-              </a:ext>
-            </a:extLst>
-          </p:cNvPr>
-          <p:cNvSpPr txBox="1"/>
-          <p:nvPr/>
-        </p:nvSpPr>
-        <p:spPr>
-          <a:xfrm>
-            <a:off x="2754775" y="6389528"/>
-            <a:ext cx="1730011" cy="369332"/>
-          </a:xfrm>
-          <a:prstGeom prst="rect">
-            <a:avLst/>
-          </a:prstGeom>
-          <a:noFill/>
-        </p:spPr>
-        <p:txBody>
-          <a:bodyPr wrap="square">
-            <a:spAutoFit/>
-          </a:bodyPr>
-          <a:lstStyle/>
-          <a:p>
-            <a:r>
-              <a:rPr lang="en-US" sz="1800" b="0" i="0" dirty="0">
-                <a:solidFill>
-                  <a:srgbClr val="36464E"/>
-                </a:solidFill>
-                <a:effectLst/>
-                <a:latin typeface="+mj-lt"/>
-              </a:rPr>
-              <a:t>256855</a:t>
-            </a:r>
-            <a:r>
-              <a:rPr lang="en-US" sz="1800" b="1" i="0" dirty="0">
-                <a:solidFill>
-                  <a:srgbClr val="36464E"/>
-                </a:solidFill>
-                <a:effectLst/>
-                <a:latin typeface="+mj-lt"/>
-              </a:rPr>
-              <a:t>28</a:t>
-            </a:r>
-            <a:r>
-              <a:rPr lang="en-US" sz="1800" b="0" i="0" dirty="0">
-                <a:solidFill>
-                  <a:srgbClr val="36464E"/>
-                </a:solidFill>
-                <a:effectLst/>
-                <a:latin typeface="+mj-lt"/>
-              </a:rPr>
-              <a:t> (</a:t>
-            </a:r>
-            <a:r>
-              <a:rPr lang="en-US" sz="1800" b="0" i="0" dirty="0" err="1">
-                <a:solidFill>
-                  <a:srgbClr val="36464E"/>
-                </a:solidFill>
-                <a:effectLst/>
-                <a:latin typeface="+mj-lt"/>
-              </a:rPr>
-              <a:t>ptr</a:t>
-            </a:r>
-            <a:r>
-              <a:rPr lang="en-US" sz="1800" b="0" i="0" dirty="0">
-                <a:solidFill>
-                  <a:srgbClr val="36464E"/>
-                </a:solidFill>
-                <a:effectLst/>
-                <a:latin typeface="+mj-lt"/>
-              </a:rPr>
-              <a:t>)</a:t>
-            </a:r>
-          </a:p>
-        </p:txBody>
-      </p:sp>
-      <p:sp>
-        <p:nvSpPr>
           <p:cNvPr id="8" name="TextBox 7">
             <a:extLst>
               <a:ext uri="{FF2B5EF4-FFF2-40B4-BE49-F238E27FC236}">
@@ -10958,7 +11416,7 @@
         </p:nvSpPr>
         <p:spPr>
           <a:xfrm>
-            <a:off x="4825291" y="6410401"/>
+            <a:off x="6349305" y="6410401"/>
             <a:ext cx="2100609" cy="369332"/>
           </a:xfrm>
           <a:prstGeom prst="rect">
@@ -10990,7 +11448,7 @@
                 <a:effectLst/>
                 <a:latin typeface="+mj-lt"/>
               </a:rPr>
-              <a:t>32</a:t>
+              <a:t>36</a:t>
             </a:r>
             <a:r>
               <a:rPr lang="en-US" sz="1800" b="0" i="0" dirty="0">
@@ -11031,161 +11489,6 @@
               </a:rPr>
               <a:t> </a:t>
             </a:r>
-          </a:p>
-        </p:txBody>
-      </p:sp>
-      <p:sp>
-        <p:nvSpPr>
-          <p:cNvPr id="10" name="TextBox 9">
-            <a:extLst>
-              <a:ext uri="{FF2B5EF4-FFF2-40B4-BE49-F238E27FC236}">
-                <a16:creationId xmlns:a16="http://schemas.microsoft.com/office/drawing/2014/main" id="{D0EAB353-DA0C-F40F-07F8-FF15B60B59F7}"/>
-              </a:ext>
-            </a:extLst>
-          </p:cNvPr>
-          <p:cNvSpPr txBox="1"/>
-          <p:nvPr/>
-        </p:nvSpPr>
-        <p:spPr>
-          <a:xfrm>
-            <a:off x="3856111" y="5553625"/>
-            <a:ext cx="742384" cy="369332"/>
-          </a:xfrm>
-          <a:prstGeom prst="rect">
-            <a:avLst/>
-          </a:prstGeom>
-          <a:noFill/>
-        </p:spPr>
-        <p:txBody>
-          <a:bodyPr wrap="square" rtlCol="0">
-            <a:spAutoFit/>
-          </a:bodyPr>
-          <a:lstStyle/>
-          <a:p>
-            <a:r>
-              <a:rPr lang="en-US" dirty="0"/>
-              <a:t>…</a:t>
-            </a:r>
-            <a:endParaRPr lang="en-SG" dirty="0"/>
-          </a:p>
-        </p:txBody>
-      </p:sp>
-      <p:sp>
-        <p:nvSpPr>
-          <p:cNvPr id="11" name="TextBox 10">
-            <a:extLst>
-              <a:ext uri="{FF2B5EF4-FFF2-40B4-BE49-F238E27FC236}">
-                <a16:creationId xmlns:a16="http://schemas.microsoft.com/office/drawing/2014/main" id="{C47234B5-84FB-6495-7610-BBF77AAF6B3A}"/>
-              </a:ext>
-            </a:extLst>
-          </p:cNvPr>
-          <p:cNvSpPr txBox="1"/>
-          <p:nvPr/>
-        </p:nvSpPr>
-        <p:spPr>
-          <a:xfrm>
-            <a:off x="7623028" y="5562326"/>
-            <a:ext cx="742384" cy="369332"/>
-          </a:xfrm>
-          <a:prstGeom prst="rect">
-            <a:avLst/>
-          </a:prstGeom>
-          <a:noFill/>
-        </p:spPr>
-        <p:txBody>
-          <a:bodyPr wrap="square" rtlCol="0">
-            <a:spAutoFit/>
-          </a:bodyPr>
-          <a:lstStyle/>
-          <a:p>
-            <a:r>
-              <a:rPr lang="en-US" dirty="0"/>
-              <a:t>…</a:t>
-            </a:r>
-            <a:endParaRPr lang="en-SG" dirty="0"/>
-          </a:p>
-        </p:txBody>
-      </p:sp>
-      <p:sp>
-        <p:nvSpPr>
-          <p:cNvPr id="13" name="Left Brace 12">
-            <a:extLst>
-              <a:ext uri="{FF2B5EF4-FFF2-40B4-BE49-F238E27FC236}">
-                <a16:creationId xmlns:a16="http://schemas.microsoft.com/office/drawing/2014/main" id="{06F48D8D-2E57-295D-73E8-4A8BF0C9C6BA}"/>
-              </a:ext>
-            </a:extLst>
-          </p:cNvPr>
-          <p:cNvSpPr/>
-          <p:nvPr/>
-        </p:nvSpPr>
-        <p:spPr>
-          <a:xfrm rot="5400000">
-            <a:off x="5145544" y="4647652"/>
-            <a:ext cx="199233" cy="1532697"/>
-          </a:xfrm>
-          <a:prstGeom prst="leftBrace">
-            <a:avLst>
-              <a:gd name="adj1" fmla="val 8333"/>
-              <a:gd name="adj2" fmla="val 54472"/>
-            </a:avLst>
-          </a:prstGeom>
-        </p:spPr>
-        <p:style>
-          <a:lnRef idx="1">
-            <a:schemeClr val="accent1"/>
-          </a:lnRef>
-          <a:fillRef idx="0">
-            <a:schemeClr val="accent1"/>
-          </a:fillRef>
-          <a:effectRef idx="0">
-            <a:schemeClr val="accent1"/>
-          </a:effectRef>
-          <a:fontRef idx="minor">
-            <a:schemeClr val="tx1"/>
-          </a:fontRef>
-        </p:style>
-        <p:txBody>
-          <a:bodyPr rtlCol="0" anchor="ctr"/>
-          <a:lstStyle/>
-          <a:p>
-            <a:pPr algn="ctr"/>
-            <a:endParaRPr lang="en-SG"/>
-          </a:p>
-        </p:txBody>
-      </p:sp>
-      <p:sp>
-        <p:nvSpPr>
-          <p:cNvPr id="14" name="TextBox 13">
-            <a:extLst>
-              <a:ext uri="{FF2B5EF4-FFF2-40B4-BE49-F238E27FC236}">
-                <a16:creationId xmlns:a16="http://schemas.microsoft.com/office/drawing/2014/main" id="{361A83A8-68AB-9A83-D2FE-2E4D1677F9CC}"/>
-              </a:ext>
-            </a:extLst>
-          </p:cNvPr>
-          <p:cNvSpPr txBox="1"/>
-          <p:nvPr/>
-        </p:nvSpPr>
-        <p:spPr>
-          <a:xfrm>
-            <a:off x="4095457" y="4908585"/>
-            <a:ext cx="3391357" cy="369332"/>
-          </a:xfrm>
-          <a:prstGeom prst="rect">
-            <a:avLst/>
-          </a:prstGeom>
-          <a:noFill/>
-        </p:spPr>
-        <p:txBody>
-          <a:bodyPr wrap="square" rtlCol="0">
-            <a:spAutoFit/>
-          </a:bodyPr>
-          <a:lstStyle/>
-          <a:p>
-            <a:r>
-              <a:rPr lang="en-US" dirty="0"/>
-              <a:t>4 bytes allocated for x</a:t>
-            </a:r>
-            <a:endParaRPr lang="en-SG" dirty="0"/>
           </a:p>
         </p:txBody>
       </p:sp>
@@ -11253,15 +11556,33 @@
                                   </p:childTnLst>
                                 </p:cTn>
                               </p:par>
+                            </p:childTnLst>
+                          </p:cTn>
+                        </p:par>
+                      </p:childTnLst>
+                    </p:cTn>
+                  </p:par>
+                  <p:par>
+                    <p:cTn id="7" fill="hold">
+                      <p:stCondLst>
+                        <p:cond delay="indefinite"/>
+                      </p:stCondLst>
+                      <p:childTnLst>
+                        <p:par>
+                          <p:cTn id="8" fill="hold">
+                            <p:stCondLst>
+                              <p:cond delay="0"/>
+                            </p:stCondLst>
+                            <p:childTnLst>
                               <p:par>
-                                <p:cTn id="7" presetID="1" presetClass="entr" presetSubtype="0" fill="hold" nodeType="withEffect">
+                                <p:cTn id="9" presetID="1" presetClass="entr" presetSubtype="0" fill="hold" nodeType="clickEffect">
                                   <p:stCondLst>
                                     <p:cond delay="0"/>
                                   </p:stCondLst>
                                   <p:childTnLst>
                                     <p:set>
                                       <p:cBhvr>
-                                        <p:cTn id="8" dur="1" fill="hold">
+                                        <p:cTn id="10" dur="1" fill="hold">
                                           <p:stCondLst>
                                             <p:cond delay="0"/>
                                           </p:stCondLst>
@@ -11285,24 +11606,20 @@
                                 </p:cTn>
                               </p:par>
                               <p:par>
-                                <p:cTn id="9" presetID="1" presetClass="entr" presetSubtype="0" fill="hold" nodeType="withEffect">
+                                <p:cTn id="11" presetID="1" presetClass="entr" presetSubtype="0" fill="hold" nodeType="withEffect">
                                   <p:stCondLst>
                                     <p:cond delay="0"/>
                                   </p:stCondLst>
                                   <p:childTnLst>
                                     <p:set>
                                       <p:cBhvr>
-                                        <p:cTn id="10" dur="1" fill="hold">
+                                        <p:cTn id="12" dur="1" fill="hold">
                                           <p:stCondLst>
                                             <p:cond delay="0"/>
                                           </p:stCondLst>
                                         </p:cTn>
                                         <p:tgtEl>
-                                          <p:spTgt spid="9">
-                                            <p:txEl>
-                                              <p:pRg st="7" end="7"/>
-                                            </p:txEl>
-                                          </p:spTgt>
+                                          <p:spTgt spid="5"/>
                                         </p:tgtEl>
                                         <p:attrNameLst>
                                           <p:attrName>style.visibility</p:attrName>
@@ -11315,26 +11632,8 @@
                                   </p:childTnLst>
                                 </p:cTn>
                               </p:par>
-                            </p:childTnLst>
-                          </p:cTn>
-                        </p:par>
-                      </p:childTnLst>
-                    </p:cTn>
-                  </p:par>
-                  <p:par>
-                    <p:cTn id="11" fill="hold">
-                      <p:stCondLst>
-                        <p:cond delay="indefinite"/>
-                      </p:stCondLst>
-                      <p:childTnLst>
-                        <p:par>
-                          <p:cTn id="12" fill="hold">
-                            <p:stCondLst>
-                              <p:cond delay="0"/>
-                            </p:stCondLst>
-                            <p:childTnLst>
                               <p:par>
-                                <p:cTn id="13" presetID="1" presetClass="entr" presetSubtype="0" fill="hold" nodeType="clickEffect">
+                                <p:cTn id="13" presetID="1" presetClass="entr" presetSubtype="0" fill="hold" grpId="0" nodeType="withEffect">
                                   <p:stCondLst>
                                     <p:cond delay="0"/>
                                   </p:stCondLst>
@@ -11347,7 +11646,7 @@
                                           </p:stCondLst>
                                         </p:cTn>
                                         <p:tgtEl>
-                                          <p:spTgt spid="5"/>
+                                          <p:spTgt spid="7"/>
                                         </p:tgtEl>
                                         <p:attrNameLst>
                                           <p:attrName>style.visibility</p:attrName>
@@ -11374,7 +11673,7 @@
                                           </p:stCondLst>
                                         </p:cTn>
                                         <p:tgtEl>
-                                          <p:spTgt spid="6"/>
+                                          <p:spTgt spid="4"/>
                                         </p:tgtEl>
                                         <p:attrNameLst>
                                           <p:attrName>style.visibility</p:attrName>
@@ -11401,7 +11700,7 @@
                                           </p:stCondLst>
                                         </p:cTn>
                                         <p:tgtEl>
-                                          <p:spTgt spid="8"/>
+                                          <p:spTgt spid="10"/>
                                         </p:tgtEl>
                                         <p:attrNameLst>
                                           <p:attrName>style.visibility</p:attrName>
@@ -11428,7 +11727,191 @@
                                           </p:stCondLst>
                                         </p:cTn>
                                         <p:tgtEl>
-                                          <p:spTgt spid="7"/>
+                                          <p:spTgt spid="11"/>
+                                        </p:tgtEl>
+                                        <p:attrNameLst>
+                                          <p:attrName>style.visibility</p:attrName>
+                                        </p:attrNameLst>
+                                      </p:cBhvr>
+                                      <p:to>
+                                        <p:strVal val="visible"/>
+                                      </p:to>
+                                    </p:set>
+                                  </p:childTnLst>
+                                </p:cTn>
+                              </p:par>
+                              <p:par>
+                                <p:cTn id="21" presetID="1" presetClass="entr" presetSubtype="0" fill="hold" grpId="0" nodeType="withEffect">
+                                  <p:stCondLst>
+                                    <p:cond delay="0"/>
+                                  </p:stCondLst>
+                                  <p:childTnLst>
+                                    <p:set>
+                                      <p:cBhvr>
+                                        <p:cTn id="22" dur="1" fill="hold">
+                                          <p:stCondLst>
+                                            <p:cond delay="0"/>
+                                          </p:stCondLst>
+                                        </p:cTn>
+                                        <p:tgtEl>
+                                          <p:spTgt spid="13"/>
+                                        </p:tgtEl>
+                                        <p:attrNameLst>
+                                          <p:attrName>style.visibility</p:attrName>
+                                        </p:attrNameLst>
+                                      </p:cBhvr>
+                                      <p:to>
+                                        <p:strVal val="visible"/>
+                                      </p:to>
+                                    </p:set>
+                                  </p:childTnLst>
+                                </p:cTn>
+                              </p:par>
+                              <p:par>
+                                <p:cTn id="23" presetID="1" presetClass="entr" presetSubtype="0" fill="hold" grpId="0" nodeType="withEffect">
+                                  <p:stCondLst>
+                                    <p:cond delay="0"/>
+                                  </p:stCondLst>
+                                  <p:childTnLst>
+                                    <p:set>
+                                      <p:cBhvr>
+                                        <p:cTn id="24" dur="1" fill="hold">
+                                          <p:stCondLst>
+                                            <p:cond delay="0"/>
+                                          </p:stCondLst>
+                                        </p:cTn>
+                                        <p:tgtEl>
+                                          <p:spTgt spid="14"/>
+                                        </p:tgtEl>
+                                        <p:attrNameLst>
+                                          <p:attrName>style.visibility</p:attrName>
+                                        </p:attrNameLst>
+                                      </p:cBhvr>
+                                      <p:to>
+                                        <p:strVal val="visible"/>
+                                      </p:to>
+                                    </p:set>
+                                  </p:childTnLst>
+                                </p:cTn>
+                              </p:par>
+                              <p:par>
+                                <p:cTn id="25" presetID="1" presetClass="entr" presetSubtype="0" fill="hold" nodeType="withEffect">
+                                  <p:stCondLst>
+                                    <p:cond delay="0"/>
+                                  </p:stCondLst>
+                                  <p:childTnLst>
+                                    <p:set>
+                                      <p:cBhvr>
+                                        <p:cTn id="26" dur="1" fill="hold">
+                                          <p:stCondLst>
+                                            <p:cond delay="0"/>
+                                          </p:stCondLst>
+                                        </p:cTn>
+                                        <p:tgtEl>
+                                          <p:spTgt spid="17"/>
+                                        </p:tgtEl>
+                                        <p:attrNameLst>
+                                          <p:attrName>style.visibility</p:attrName>
+                                        </p:attrNameLst>
+                                      </p:cBhvr>
+                                      <p:to>
+                                        <p:strVal val="visible"/>
+                                      </p:to>
+                                    </p:set>
+                                  </p:childTnLst>
+                                </p:cTn>
+                              </p:par>
+                            </p:childTnLst>
+                          </p:cTn>
+                        </p:par>
+                      </p:childTnLst>
+                    </p:cTn>
+                  </p:par>
+                  <p:par>
+                    <p:cTn id="27" fill="hold">
+                      <p:stCondLst>
+                        <p:cond delay="indefinite"/>
+                      </p:stCondLst>
+                      <p:childTnLst>
+                        <p:par>
+                          <p:cTn id="28" fill="hold">
+                            <p:stCondLst>
+                              <p:cond delay="0"/>
+                            </p:stCondLst>
+                            <p:childTnLst>
+                              <p:par>
+                                <p:cTn id="29" presetID="1" presetClass="entr" presetSubtype="0" fill="hold" nodeType="clickEffect">
+                                  <p:stCondLst>
+                                    <p:cond delay="0"/>
+                                  </p:stCondLst>
+                                  <p:childTnLst>
+                                    <p:set>
+                                      <p:cBhvr>
+                                        <p:cTn id="30" dur="1" fill="hold">
+                                          <p:stCondLst>
+                                            <p:cond delay="0"/>
+                                          </p:stCondLst>
+                                        </p:cTn>
+                                        <p:tgtEl>
+                                          <p:spTgt spid="9">
+                                            <p:txEl>
+                                              <p:pRg st="7" end="7"/>
+                                            </p:txEl>
+                                          </p:spTgt>
+                                        </p:tgtEl>
+                                        <p:attrNameLst>
+                                          <p:attrName>style.visibility</p:attrName>
+                                        </p:attrNameLst>
+                                      </p:cBhvr>
+                                      <p:to>
+                                        <p:strVal val="visible"/>
+                                      </p:to>
+                                    </p:set>
+                                  </p:childTnLst>
+                                </p:cTn>
+                              </p:par>
+                              <p:par>
+                                <p:cTn id="31" presetID="1" presetClass="entr" presetSubtype="0" fill="hold" grpId="0" nodeType="withEffect">
+                                  <p:stCondLst>
+                                    <p:cond delay="0"/>
+                                  </p:stCondLst>
+                                  <p:childTnLst>
+                                    <p:set>
+                                      <p:cBhvr>
+                                        <p:cTn id="32" dur="1" fill="hold">
+                                          <p:stCondLst>
+                                            <p:cond delay="0"/>
+                                          </p:stCondLst>
+                                        </p:cTn>
+                                        <p:tgtEl>
+                                          <p:spTgt spid="8"/>
+                                        </p:tgtEl>
+                                        <p:attrNameLst>
+                                          <p:attrName>style.visibility</p:attrName>
+                                        </p:attrNameLst>
+                                      </p:cBhvr>
+                                      <p:to>
+                                        <p:strVal val="visible"/>
+                                      </p:to>
+                                    </p:set>
+                                  </p:childTnLst>
+                                </p:cTn>
+                              </p:par>
+                              <p:par>
+                                <p:cTn id="33" presetID="1" presetClass="entr" presetSubtype="0" fill="hold" nodeType="withEffect">
+                                  <p:stCondLst>
+                                    <p:cond delay="0"/>
+                                  </p:stCondLst>
+                                  <p:childTnLst>
+                                    <p:set>
+                                      <p:cBhvr>
+                                        <p:cTn id="34" dur="1" fill="hold">
+                                          <p:stCondLst>
+                                            <p:cond delay="0"/>
+                                          </p:stCondLst>
+                                        </p:cTn>
+                                        <p:tgtEl>
+                                          <p:spTgt spid="6"/>
                                         </p:tgtEl>
                                         <p:attrNameLst>
                                           <p:attrName>style.visibility</p:attrName>
@@ -11470,6 +11953,10 @@
     </p:tnLst>
     <p:bldLst>
       <p:bldP spid="7" grpId="0"/>
+      <p:bldP spid="10" grpId="0"/>
+      <p:bldP spid="11" grpId="0"/>
+      <p:bldP spid="13" grpId="0" animBg="1"/>
+      <p:bldP spid="14" grpId="0"/>
       <p:bldP spid="8" grpId="0"/>
     </p:bldLst>
   </p:timing>
@@ -11795,7 +12282,15 @@
             </a:r>
             <a:r>
               <a:rPr lang="en-US" dirty="0"/>
-              <a:t> + 1 is </a:t>
+              <a:t> + </a:t>
+            </a:r>
+            <a:r>
+              <a:rPr lang="en-US" b="1" dirty="0"/>
+              <a:t>1</a:t>
+            </a:r>
+            <a:r>
+              <a:rPr lang="en-US" dirty="0"/>
+              <a:t> is </a:t>
             </a:r>
             <a:r>
               <a:rPr lang="en-US" sz="2000" b="0" i="0" dirty="0">
@@ -11815,11 +12310,19 @@
                 <a:effectLst/>
                 <a:latin typeface="+mj-lt"/>
               </a:rPr>
-              <a:t>32</a:t>
+              <a:t>36</a:t>
             </a:r>
             <a:r>
               <a:rPr lang="en-US" dirty="0"/>
-              <a:t> (i.e., &amp;a[1])</a:t>
+              <a:t> (i.e., &amp;a[</a:t>
+            </a:r>
+            <a:r>
+              <a:rPr lang="en-US" b="1" dirty="0"/>
+              <a:t>1</a:t>
+            </a:r>
+            <a:r>
+              <a:rPr lang="en-US" dirty="0"/>
+              <a:t>])</a:t>
             </a:r>
           </a:p>
           <a:p>
@@ -11857,51 +12360,49 @@
               <a:defRPr/>
             </a:pPr>
             <a:r>
-              <a:rPr lang="en-US" b="1" dirty="0" err="1"/>
+              <a:rPr lang="en-US" dirty="0" err="1"/>
               <a:t>ptr</a:t>
             </a:r>
             <a:r>
-              <a:rPr lang="en-US" b="1" dirty="0"/>
+              <a:rPr lang="en-US" dirty="0"/>
               <a:t> + </a:t>
             </a:r>
             <a:r>
-              <a:rPr lang="en-US" b="1" dirty="0" err="1"/>
+              <a:rPr lang="en-US" dirty="0" err="1">
+                <a:solidFill>
+                  <a:srgbClr val="0000FF"/>
+                </a:solidFill>
+              </a:rPr>
               <a:t>i</a:t>
             </a:r>
             <a:r>
-              <a:rPr lang="en-US" b="1" dirty="0"/>
-              <a:t> is a[</a:t>
-            </a:r>
-            <a:r>
-              <a:rPr lang="en-US" b="1" dirty="0" err="1"/>
+              <a:rPr lang="en-US" dirty="0"/>
+              <a:t> is &amp;a[</a:t>
+            </a:r>
+            <a:r>
+              <a:rPr lang="en-US" dirty="0" err="1">
+                <a:solidFill>
+                  <a:srgbClr val="0000FF"/>
+                </a:solidFill>
+              </a:rPr>
               <a:t>i</a:t>
             </a:r>
             <a:r>
-              <a:rPr lang="en-US" b="1" dirty="0"/>
-              <a:t>]</a:t>
-            </a:r>
-            <a:r>
               <a:rPr lang="en-US" dirty="0"/>
-              <a:t>!</a:t>
-            </a:r>
-          </a:p>
-          <a:p>
-            <a:pPr marL="621983" lvl="1" indent="-347663">
-              <a:spcBef>
-                <a:spcPts val="600"/>
-              </a:spcBef>
-              <a:buClr>
-                <a:schemeClr val="tx1">
-                  <a:lumMod val="90000"/>
-                  <a:lumOff val="10000"/>
-                </a:schemeClr>
-              </a:buClr>
-              <a:buSzPct val="100000"/>
-              <a:buFont typeface="Wingdings" panose="05000000000000000000" pitchFamily="2" charset="2"/>
-              <a:buChar char="§"/>
-              <a:defRPr/>
-            </a:pPr>
-            <a:endParaRPr lang="en-US" dirty="0"/>
+              <a:t>] if </a:t>
+            </a:r>
+            <a:r>
+              <a:rPr lang="en-US" dirty="0" err="1"/>
+              <a:t>ptr</a:t>
+            </a:r>
+            <a:r>
+              <a:rPr lang="en-US"/>
+              <a:t> contains a</a:t>
+            </a:r>
+            <a:r>
+              <a:rPr lang="en-US" dirty="0"/>
+              <a:t>.</a:t>
+            </a:r>
           </a:p>
           <a:p>
             <a:pPr marL="621983" lvl="1" indent="-347663">
@@ -12176,465 +12677,6 @@
           </a:p>
         </p:txBody>
       </p:sp>
-      <p:pic>
-        <p:nvPicPr>
-          <p:cNvPr id="4" name="Picture 3" descr="Table&#10;&#10;Description automatically generated with medium confidence">
-            <a:extLst>
-              <a:ext uri="{FF2B5EF4-FFF2-40B4-BE49-F238E27FC236}">
-                <a16:creationId xmlns:a16="http://schemas.microsoft.com/office/drawing/2014/main" id="{281A4FD2-E4F1-724D-CF79-C79F01B7193B}"/>
-              </a:ext>
-            </a:extLst>
-          </p:cNvPr>
-          <p:cNvPicPr>
-            <a:picLocks noChangeAspect="1"/>
-          </p:cNvPicPr>
-          <p:nvPr/>
-        </p:nvPicPr>
-        <p:blipFill rotWithShape="1">
-          <a:blip r:embed="rId3">
-            <a:extLst>
-              <a:ext uri="{28A0092B-C50C-407E-A947-70E740481C1C}">
-                <a14:useLocalDpi xmlns:a14="http://schemas.microsoft.com/office/drawing/2010/main" val="0"/>
-              </a:ext>
-            </a:extLst>
-          </a:blip>
-          <a:srcRect l="30832" t="19125" r="32079" b="68424"/>
-          <a:stretch/>
-        </p:blipFill>
-        <p:spPr>
-          <a:xfrm>
-            <a:off x="5122471" y="5549887"/>
-            <a:ext cx="3391357" cy="444742"/>
-          </a:xfrm>
-          <a:prstGeom prst="rect">
-            <a:avLst/>
-          </a:prstGeom>
-        </p:spPr>
-      </p:pic>
-      <p:cxnSp>
-        <p:nvCxnSpPr>
-          <p:cNvPr id="5" name="Straight Arrow Connector 4">
-            <a:extLst>
-              <a:ext uri="{FF2B5EF4-FFF2-40B4-BE49-F238E27FC236}">
-                <a16:creationId xmlns:a16="http://schemas.microsoft.com/office/drawing/2014/main" id="{344D6F7F-4CC8-AB06-D390-91110966AB98}"/>
-              </a:ext>
-            </a:extLst>
-          </p:cNvPr>
-          <p:cNvCxnSpPr>
-            <a:cxnSpLocks/>
-          </p:cNvCxnSpPr>
-          <p:nvPr/>
-        </p:nvCxnSpPr>
-        <p:spPr>
-          <a:xfrm flipV="1">
-            <a:off x="4554721" y="5769404"/>
-            <a:ext cx="932507" cy="552338"/>
-          </a:xfrm>
-          <a:prstGeom prst="straightConnector1">
-            <a:avLst/>
-          </a:prstGeom>
-          <a:ln w="25400">
-            <a:solidFill>
-              <a:srgbClr val="FF0000"/>
-            </a:solidFill>
-            <a:tailEnd type="triangle"/>
-          </a:ln>
-        </p:spPr>
-        <p:style>
-          <a:lnRef idx="1">
-            <a:schemeClr val="accent1"/>
-          </a:lnRef>
-          <a:fillRef idx="0">
-            <a:schemeClr val="accent1"/>
-          </a:fillRef>
-          <a:effectRef idx="0">
-            <a:schemeClr val="accent1"/>
-          </a:effectRef>
-          <a:fontRef idx="minor">
-            <a:schemeClr val="tx1"/>
-          </a:fontRef>
-        </p:style>
-      </p:cxnSp>
-      <p:cxnSp>
-        <p:nvCxnSpPr>
-          <p:cNvPr id="6" name="Straight Arrow Connector 5">
-            <a:extLst>
-              <a:ext uri="{FF2B5EF4-FFF2-40B4-BE49-F238E27FC236}">
-                <a16:creationId xmlns:a16="http://schemas.microsoft.com/office/drawing/2014/main" id="{836A0946-6084-2F1F-4193-8A73209E63DA}"/>
-              </a:ext>
-            </a:extLst>
-          </p:cNvPr>
-          <p:cNvCxnSpPr>
-            <a:cxnSpLocks/>
-          </p:cNvCxnSpPr>
-          <p:nvPr/>
-        </p:nvCxnSpPr>
-        <p:spPr>
-          <a:xfrm flipV="1">
-            <a:off x="6175973" y="5786328"/>
-            <a:ext cx="932507" cy="552338"/>
-          </a:xfrm>
-          <a:prstGeom prst="straightConnector1">
-            <a:avLst/>
-          </a:prstGeom>
-          <a:ln w="25400">
-            <a:solidFill>
-              <a:srgbClr val="FF0000"/>
-            </a:solidFill>
-            <a:tailEnd type="triangle"/>
-          </a:ln>
-        </p:spPr>
-        <p:style>
-          <a:lnRef idx="1">
-            <a:schemeClr val="accent1"/>
-          </a:lnRef>
-          <a:fillRef idx="0">
-            <a:schemeClr val="accent1"/>
-          </a:fillRef>
-          <a:effectRef idx="0">
-            <a:schemeClr val="accent1"/>
-          </a:effectRef>
-          <a:fontRef idx="minor">
-            <a:schemeClr val="tx1"/>
-          </a:fontRef>
-        </p:style>
-      </p:cxnSp>
-      <p:sp>
-        <p:nvSpPr>
-          <p:cNvPr id="7" name="TextBox 6">
-            <a:extLst>
-              <a:ext uri="{FF2B5EF4-FFF2-40B4-BE49-F238E27FC236}">
-                <a16:creationId xmlns:a16="http://schemas.microsoft.com/office/drawing/2014/main" id="{0D56054E-DA22-A52C-0CF2-5A1432E2837D}"/>
-              </a:ext>
-            </a:extLst>
-          </p:cNvPr>
-          <p:cNvSpPr txBox="1"/>
-          <p:nvPr/>
-        </p:nvSpPr>
-        <p:spPr>
-          <a:xfrm>
-            <a:off x="2489703" y="6369568"/>
-            <a:ext cx="2846173" cy="369332"/>
-          </a:xfrm>
-          <a:prstGeom prst="rect">
-            <a:avLst/>
-          </a:prstGeom>
-          <a:noFill/>
-        </p:spPr>
-        <p:txBody>
-          <a:bodyPr wrap="square">
-            <a:spAutoFit/>
-          </a:bodyPr>
-          <a:lstStyle/>
-          <a:p>
-            <a:r>
-              <a:rPr lang="en-US" sz="1800" b="0" i="0" dirty="0">
-                <a:solidFill>
-                  <a:srgbClr val="36464E"/>
-                </a:solidFill>
-                <a:effectLst/>
-                <a:latin typeface="+mj-lt"/>
-              </a:rPr>
-              <a:t>256855</a:t>
-            </a:r>
-            <a:r>
-              <a:rPr lang="en-US" sz="1800" b="1" i="0" dirty="0">
-                <a:solidFill>
-                  <a:srgbClr val="36464E"/>
-                </a:solidFill>
-                <a:effectLst/>
-                <a:latin typeface="+mj-lt"/>
-              </a:rPr>
-              <a:t>28</a:t>
-            </a:r>
-            <a:r>
-              <a:rPr lang="en-US" sz="1800" b="0" i="0" dirty="0">
-                <a:solidFill>
-                  <a:srgbClr val="36464E"/>
-                </a:solidFill>
-                <a:effectLst/>
-                <a:latin typeface="+mj-lt"/>
-              </a:rPr>
-              <a:t> (&amp;a[0], </a:t>
-            </a:r>
-            <a:r>
-              <a:rPr lang="en-US" sz="1800" b="0" i="0" dirty="0" err="1">
-                <a:solidFill>
-                  <a:srgbClr val="36464E"/>
-                </a:solidFill>
-                <a:effectLst/>
-                <a:latin typeface="+mj-lt"/>
-              </a:rPr>
-              <a:t>ptr</a:t>
-            </a:r>
-            <a:r>
-              <a:rPr lang="en-US" sz="1800" b="0" i="0" dirty="0">
-                <a:solidFill>
-                  <a:srgbClr val="36464E"/>
-                </a:solidFill>
-                <a:effectLst/>
-                <a:latin typeface="+mj-lt"/>
-              </a:rPr>
-              <a:t>)</a:t>
-            </a:r>
-          </a:p>
-        </p:txBody>
-      </p:sp>
-      <p:sp>
-        <p:nvSpPr>
-          <p:cNvPr id="8" name="TextBox 7">
-            <a:extLst>
-              <a:ext uri="{FF2B5EF4-FFF2-40B4-BE49-F238E27FC236}">
-                <a16:creationId xmlns:a16="http://schemas.microsoft.com/office/drawing/2014/main" id="{3DA94227-8FEE-E8C9-57AC-1AFDCA8DC7CA}"/>
-              </a:ext>
-            </a:extLst>
-          </p:cNvPr>
-          <p:cNvSpPr txBox="1"/>
-          <p:nvPr/>
-        </p:nvSpPr>
-        <p:spPr>
-          <a:xfrm>
-            <a:off x="5676381" y="6390441"/>
-            <a:ext cx="3010419" cy="369332"/>
-          </a:xfrm>
-          <a:prstGeom prst="rect">
-            <a:avLst/>
-          </a:prstGeom>
-          <a:noFill/>
-        </p:spPr>
-        <p:txBody>
-          <a:bodyPr wrap="square">
-            <a:spAutoFit/>
-          </a:bodyPr>
-          <a:lstStyle/>
-          <a:p>
-            <a:r>
-              <a:rPr lang="en-US" sz="1800" b="0" i="0" dirty="0">
-                <a:solidFill>
-                  <a:srgbClr val="36464E"/>
-                </a:solidFill>
-                <a:effectLst/>
-                <a:latin typeface="+mj-lt"/>
-              </a:rPr>
-              <a:t>256855</a:t>
-            </a:r>
-            <a:r>
-              <a:rPr lang="en-US" sz="1800" b="1" i="0" dirty="0">
-                <a:solidFill>
-                  <a:srgbClr val="36464E"/>
-                </a:solidFill>
-                <a:effectLst/>
-                <a:latin typeface="+mj-lt"/>
-              </a:rPr>
-              <a:t>32</a:t>
-            </a:r>
-            <a:r>
-              <a:rPr lang="en-US" sz="1800" b="0" i="0" dirty="0">
-                <a:solidFill>
-                  <a:srgbClr val="36464E"/>
-                </a:solidFill>
-                <a:effectLst/>
-                <a:latin typeface="+mj-lt"/>
-              </a:rPr>
-              <a:t> (&amp;a[1], </a:t>
-            </a:r>
-            <a:r>
-              <a:rPr lang="en-US" sz="1800" b="0" i="0" dirty="0" err="1">
-                <a:solidFill>
-                  <a:srgbClr val="36464E"/>
-                </a:solidFill>
-                <a:effectLst/>
-                <a:latin typeface="+mj-lt"/>
-              </a:rPr>
-              <a:t>ptr</a:t>
-            </a:r>
-            <a:r>
-              <a:rPr lang="en-US" sz="1800" b="0" i="0" dirty="0">
-                <a:solidFill>
-                  <a:srgbClr val="36464E"/>
-                </a:solidFill>
-                <a:effectLst/>
-                <a:latin typeface="+mj-lt"/>
-              </a:rPr>
-              <a:t> + 1</a:t>
-            </a:r>
-            <a:r>
-              <a:rPr lang="en-US" dirty="0">
-                <a:solidFill>
-                  <a:srgbClr val="36464E"/>
-                </a:solidFill>
-                <a:latin typeface="+mj-lt"/>
-              </a:rPr>
-              <a:t>)</a:t>
-            </a:r>
-            <a:r>
-              <a:rPr lang="en-US" sz="1800" b="0" i="0" dirty="0">
-                <a:solidFill>
-                  <a:srgbClr val="36464E"/>
-                </a:solidFill>
-                <a:effectLst/>
-                <a:latin typeface="+mj-lt"/>
-              </a:rPr>
-              <a:t> </a:t>
-            </a:r>
-          </a:p>
-        </p:txBody>
-      </p:sp>
-      <p:sp>
-        <p:nvSpPr>
-          <p:cNvPr id="10" name="TextBox 9">
-            <a:extLst>
-              <a:ext uri="{FF2B5EF4-FFF2-40B4-BE49-F238E27FC236}">
-                <a16:creationId xmlns:a16="http://schemas.microsoft.com/office/drawing/2014/main" id="{255908BD-4F2C-E1B4-0FB2-B2F0E5A12B86}"/>
-              </a:ext>
-            </a:extLst>
-          </p:cNvPr>
-          <p:cNvSpPr txBox="1"/>
-          <p:nvPr/>
-        </p:nvSpPr>
-        <p:spPr>
-          <a:xfrm>
-            <a:off x="4707201" y="5533665"/>
-            <a:ext cx="742384" cy="369332"/>
-          </a:xfrm>
-          <a:prstGeom prst="rect">
-            <a:avLst/>
-          </a:prstGeom>
-          <a:noFill/>
-        </p:spPr>
-        <p:txBody>
-          <a:bodyPr wrap="square" rtlCol="0">
-            <a:spAutoFit/>
-          </a:bodyPr>
-          <a:lstStyle/>
-          <a:p>
-            <a:r>
-              <a:rPr lang="en-US" dirty="0"/>
-              <a:t>…</a:t>
-            </a:r>
-            <a:endParaRPr lang="en-SG" dirty="0"/>
-          </a:p>
-        </p:txBody>
-      </p:sp>
-      <p:sp>
-        <p:nvSpPr>
-          <p:cNvPr id="11" name="TextBox 10">
-            <a:extLst>
-              <a:ext uri="{FF2B5EF4-FFF2-40B4-BE49-F238E27FC236}">
-                <a16:creationId xmlns:a16="http://schemas.microsoft.com/office/drawing/2014/main" id="{ADC68951-983D-1AA5-1613-48A5A3F051EA}"/>
-              </a:ext>
-            </a:extLst>
-          </p:cNvPr>
-          <p:cNvSpPr txBox="1"/>
-          <p:nvPr/>
-        </p:nvSpPr>
-        <p:spPr>
-          <a:xfrm>
-            <a:off x="8474118" y="5542366"/>
-            <a:ext cx="742384" cy="369332"/>
-          </a:xfrm>
-          <a:prstGeom prst="rect">
-            <a:avLst/>
-          </a:prstGeom>
-          <a:noFill/>
-        </p:spPr>
-        <p:txBody>
-          <a:bodyPr wrap="square" rtlCol="0">
-            <a:spAutoFit/>
-          </a:bodyPr>
-          <a:lstStyle/>
-          <a:p>
-            <a:r>
-              <a:rPr lang="en-US" dirty="0"/>
-              <a:t>…</a:t>
-            </a:r>
-            <a:endParaRPr lang="en-SG" dirty="0"/>
-          </a:p>
-        </p:txBody>
-      </p:sp>
-      <p:sp>
-        <p:nvSpPr>
-          <p:cNvPr id="12" name="Left Brace 11">
-            <a:extLst>
-              <a:ext uri="{FF2B5EF4-FFF2-40B4-BE49-F238E27FC236}">
-                <a16:creationId xmlns:a16="http://schemas.microsoft.com/office/drawing/2014/main" id="{5E7E47A8-8BCD-3DB3-55FE-F88BB2573BC2}"/>
-              </a:ext>
-            </a:extLst>
-          </p:cNvPr>
-          <p:cNvSpPr/>
-          <p:nvPr/>
-        </p:nvSpPr>
-        <p:spPr>
-          <a:xfrm rot="5400000">
-            <a:off x="5996634" y="4627692"/>
-            <a:ext cx="199233" cy="1532697"/>
-          </a:xfrm>
-          <a:prstGeom prst="leftBrace">
-            <a:avLst>
-              <a:gd name="adj1" fmla="val 8333"/>
-              <a:gd name="adj2" fmla="val 54472"/>
-            </a:avLst>
-          </a:prstGeom>
-        </p:spPr>
-        <p:style>
-          <a:lnRef idx="1">
-            <a:schemeClr val="accent1"/>
-          </a:lnRef>
-          <a:fillRef idx="0">
-            <a:schemeClr val="accent1"/>
-          </a:fillRef>
-          <a:effectRef idx="0">
-            <a:schemeClr val="accent1"/>
-          </a:effectRef>
-          <a:fontRef idx="minor">
-            <a:schemeClr val="tx1"/>
-          </a:fontRef>
-        </p:style>
-        <p:txBody>
-          <a:bodyPr rtlCol="0" anchor="ctr"/>
-          <a:lstStyle/>
-          <a:p>
-            <a:pPr algn="ctr"/>
-            <a:endParaRPr lang="en-SG"/>
-          </a:p>
-        </p:txBody>
-      </p:sp>
-      <p:sp>
-        <p:nvSpPr>
-          <p:cNvPr id="13" name="TextBox 12">
-            <a:extLst>
-              <a:ext uri="{FF2B5EF4-FFF2-40B4-BE49-F238E27FC236}">
-                <a16:creationId xmlns:a16="http://schemas.microsoft.com/office/drawing/2014/main" id="{74CC3C61-AA56-CCBD-5E4B-2353A3E3B9B5}"/>
-              </a:ext>
-            </a:extLst>
-          </p:cNvPr>
-          <p:cNvSpPr txBox="1"/>
-          <p:nvPr/>
-        </p:nvSpPr>
-        <p:spPr>
-          <a:xfrm>
-            <a:off x="4946547" y="4888625"/>
-            <a:ext cx="3391357" cy="369332"/>
-          </a:xfrm>
-          <a:prstGeom prst="rect">
-            <a:avLst/>
-          </a:prstGeom>
-          <a:noFill/>
-        </p:spPr>
-        <p:txBody>
-          <a:bodyPr wrap="square" rtlCol="0">
-            <a:spAutoFit/>
-          </a:bodyPr>
-          <a:lstStyle/>
-          <a:p>
-            <a:r>
-              <a:rPr lang="en-US" dirty="0"/>
-              <a:t>4 bytes allocated for a[0]</a:t>
-            </a:r>
-            <a:endParaRPr lang="en-SG" dirty="0"/>
-          </a:p>
-        </p:txBody>
-      </p:sp>
     </p:spTree>
     <p:extLst>
       <p:ext uri="{BB962C8B-B14F-4D97-AF65-F5344CB8AC3E}">
@@ -12648,166 +12690,6 @@
   <p:transition>
     <p:fade/>
   </p:transition>
-  <p:timing>
-    <p:tnLst>
-      <p:par>
-        <p:cTn id="1" dur="indefinite" restart="never" nodeType="tmRoot">
-          <p:childTnLst>
-            <p:seq concurrent="1" nextAc="seek">
-              <p:cTn id="2" dur="indefinite" nodeType="mainSeq">
-                <p:childTnLst>
-                  <p:par>
-                    <p:cTn id="3" fill="hold">
-                      <p:stCondLst>
-                        <p:cond delay="indefinite"/>
-                      </p:stCondLst>
-                      <p:childTnLst>
-                        <p:par>
-                          <p:cTn id="4" fill="hold">
-                            <p:stCondLst>
-                              <p:cond delay="0"/>
-                            </p:stCondLst>
-                            <p:childTnLst>
-                              <p:par>
-                                <p:cTn id="5" presetID="1" presetClass="entr" presetSubtype="0" fill="hold" nodeType="clickEffect">
-                                  <p:stCondLst>
-                                    <p:cond delay="0"/>
-                                  </p:stCondLst>
-                                  <p:childTnLst>
-                                    <p:set>
-                                      <p:cBhvr>
-                                        <p:cTn id="6" dur="1" fill="hold">
-                                          <p:stCondLst>
-                                            <p:cond delay="0"/>
-                                          </p:stCondLst>
-                                        </p:cTn>
-                                        <p:tgtEl>
-                                          <p:spTgt spid="5"/>
-                                        </p:tgtEl>
-                                        <p:attrNameLst>
-                                          <p:attrName>style.visibility</p:attrName>
-                                        </p:attrNameLst>
-                                      </p:cBhvr>
-                                      <p:to>
-                                        <p:strVal val="visible"/>
-                                      </p:to>
-                                    </p:set>
-                                  </p:childTnLst>
-                                </p:cTn>
-                              </p:par>
-                              <p:par>
-                                <p:cTn id="7" presetID="1" presetClass="entr" presetSubtype="0" fill="hold" nodeType="withEffect">
-                                  <p:stCondLst>
-                                    <p:cond delay="0"/>
-                                  </p:stCondLst>
-                                  <p:childTnLst>
-                                    <p:set>
-                                      <p:cBhvr>
-                                        <p:cTn id="8" dur="1" fill="hold">
-                                          <p:stCondLst>
-                                            <p:cond delay="0"/>
-                                          </p:stCondLst>
-                                        </p:cTn>
-                                        <p:tgtEl>
-                                          <p:spTgt spid="6"/>
-                                        </p:tgtEl>
-                                        <p:attrNameLst>
-                                          <p:attrName>style.visibility</p:attrName>
-                                        </p:attrNameLst>
-                                      </p:cBhvr>
-                                      <p:to>
-                                        <p:strVal val="visible"/>
-                                      </p:to>
-                                    </p:set>
-                                  </p:childTnLst>
-                                </p:cTn>
-                              </p:par>
-                              <p:par>
-                                <p:cTn id="9" presetID="1" presetClass="entr" presetSubtype="0" fill="hold" grpId="0" nodeType="withEffect">
-                                  <p:stCondLst>
-                                    <p:cond delay="0"/>
-                                  </p:stCondLst>
-                                  <p:childTnLst>
-                                    <p:set>
-                                      <p:cBhvr>
-                                        <p:cTn id="10" dur="1" fill="hold">
-                                          <p:stCondLst>
-                                            <p:cond delay="0"/>
-                                          </p:stCondLst>
-                                        </p:cTn>
-                                        <p:tgtEl>
-                                          <p:spTgt spid="8"/>
-                                        </p:tgtEl>
-                                        <p:attrNameLst>
-                                          <p:attrName>style.visibility</p:attrName>
-                                        </p:attrNameLst>
-                                      </p:cBhvr>
-                                      <p:to>
-                                        <p:strVal val="visible"/>
-                                      </p:to>
-                                    </p:set>
-                                  </p:childTnLst>
-                                </p:cTn>
-                              </p:par>
-                              <p:par>
-                                <p:cTn id="11" presetID="1" presetClass="entr" presetSubtype="0" fill="hold" grpId="0" nodeType="withEffect">
-                                  <p:stCondLst>
-                                    <p:cond delay="0"/>
-                                  </p:stCondLst>
-                                  <p:childTnLst>
-                                    <p:set>
-                                      <p:cBhvr>
-                                        <p:cTn id="12" dur="1" fill="hold">
-                                          <p:stCondLst>
-                                            <p:cond delay="0"/>
-                                          </p:stCondLst>
-                                        </p:cTn>
-                                        <p:tgtEl>
-                                          <p:spTgt spid="7"/>
-                                        </p:tgtEl>
-                                        <p:attrNameLst>
-                                          <p:attrName>style.visibility</p:attrName>
-                                        </p:attrNameLst>
-                                      </p:cBhvr>
-                                      <p:to>
-                                        <p:strVal val="visible"/>
-                                      </p:to>
-                                    </p:set>
-                                  </p:childTnLst>
-                                </p:cTn>
-                              </p:par>
-                            </p:childTnLst>
-                          </p:cTn>
-                        </p:par>
-                      </p:childTnLst>
-                    </p:cTn>
-                  </p:par>
-                </p:childTnLst>
-              </p:cTn>
-              <p:prevCondLst>
-                <p:cond evt="onPrev" delay="0">
-                  <p:tgtEl>
-                    <p:sldTgt/>
-                  </p:tgtEl>
-                </p:cond>
-              </p:prevCondLst>
-              <p:nextCondLst>
-                <p:cond evt="onNext" delay="0">
-                  <p:tgtEl>
-                    <p:sldTgt/>
-                  </p:tgtEl>
-                </p:cond>
-              </p:nextCondLst>
-            </p:seq>
-          </p:childTnLst>
-        </p:cTn>
-      </p:par>
-    </p:tnLst>
-    <p:bldLst>
-      <p:bldP spid="7" grpId="0"/>
-      <p:bldP spid="8" grpId="0"/>
-    </p:bldLst>
-  </p:timing>
 </p:sld>
 </file>
 
@@ -15596,7 +15478,24 @@
                 <a:latin typeface="Courier New" pitchFamily="49" charset="0"/>
                 <a:cs typeface="Courier New" pitchFamily="49" charset="0"/>
               </a:rPr>
-              <a:t> main() {</a:t>
+              <a:t> main(</a:t>
+            </a:r>
+            <a:r>
+              <a:rPr lang="en-US" b="1" dirty="0">
+                <a:solidFill>
+                  <a:srgbClr val="0000FF"/>
+                </a:solidFill>
+                <a:latin typeface="Courier New" pitchFamily="49" charset="0"/>
+                <a:cs typeface="Courier New" pitchFamily="49" charset="0"/>
+              </a:rPr>
+              <a:t>void</a:t>
+            </a:r>
+            <a:r>
+              <a:rPr lang="en-US" b="1" dirty="0">
+                <a:latin typeface="Courier New" pitchFamily="49" charset="0"/>
+                <a:cs typeface="Courier New" pitchFamily="49" charset="0"/>
+              </a:rPr>
+              <a:t>) {</a:t>
             </a:r>
           </a:p>
           <a:p>
@@ -17114,7 +17013,24 @@
                 <a:latin typeface="Courier New" pitchFamily="49" charset="0"/>
                 <a:cs typeface="Courier New" pitchFamily="49" charset="0"/>
               </a:rPr>
-              <a:t> main() {</a:t>
+              <a:t> main(</a:t>
+            </a:r>
+            <a:r>
+              <a:rPr lang="en-US" sz="2000" b="1" dirty="0">
+                <a:solidFill>
+                  <a:srgbClr val="0000FF"/>
+                </a:solidFill>
+                <a:latin typeface="Courier New" pitchFamily="49" charset="0"/>
+                <a:cs typeface="Courier New" pitchFamily="49" charset="0"/>
+              </a:rPr>
+              <a:t>void</a:t>
+            </a:r>
+            <a:r>
+              <a:rPr lang="en-US" sz="2000" b="1" dirty="0">
+                <a:latin typeface="Courier New" pitchFamily="49" charset="0"/>
+                <a:cs typeface="Courier New" pitchFamily="49" charset="0"/>
+              </a:rPr>
+              <a:t>) {</a:t>
             </a:r>
           </a:p>
           <a:p>
@@ -19625,7 +19541,24 @@
                 <a:latin typeface="Courier New" pitchFamily="49" charset="0"/>
                 <a:cs typeface="Courier New" pitchFamily="49" charset="0"/>
               </a:rPr>
-              <a:t> main() {</a:t>
+              <a:t> main(</a:t>
+            </a:r>
+            <a:r>
+              <a:rPr lang="en-US" sz="2000" b="1" dirty="0">
+                <a:solidFill>
+                  <a:srgbClr val="0000FF"/>
+                </a:solidFill>
+                <a:latin typeface="Courier New" pitchFamily="49" charset="0"/>
+                <a:cs typeface="Courier New" pitchFamily="49" charset="0"/>
+              </a:rPr>
+              <a:t>void</a:t>
+            </a:r>
+            <a:r>
+              <a:rPr lang="en-US" sz="2000" b="1" dirty="0">
+                <a:latin typeface="Courier New" pitchFamily="49" charset="0"/>
+                <a:cs typeface="Courier New" pitchFamily="49" charset="0"/>
+              </a:rPr>
+              <a:t>) {</a:t>
             </a:r>
           </a:p>
           <a:p>
@@ -19769,42 +19702,15 @@
               <a:t> long </a:t>
             </a:r>
             <a:r>
-              <a:rPr lang="de-DE" sz="2000" b="1" dirty="0" err="1">
+              <a:rPr lang="de-DE" sz="2000" b="1" dirty="0">
                 <a:solidFill>
                   <a:schemeClr val="tx1"/>
                 </a:solidFill>
                 <a:latin typeface="Courier New" pitchFamily="49" charset="0"/>
                 <a:cs typeface="Courier New" pitchFamily="49" charset="0"/>
               </a:rPr>
-              <a:t>max</a:t>
-            </a:r>
-            <a:r>
-              <a:rPr lang="de-DE" sz="2000" b="1" err="1">
-                <a:solidFill>
-                  <a:schemeClr val="tx1"/>
-                </a:solidFill>
-                <a:latin typeface="Courier New" pitchFamily="49" charset="0"/>
-                <a:cs typeface="Courier New" pitchFamily="49" charset="0"/>
-              </a:rPr>
-              <a:t>_</a:t>
-            </a:r>
-            <a:r>
-              <a:rPr lang="de-DE" sz="2000" b="1">
-                <a:solidFill>
-                  <a:schemeClr val="tx1"/>
-                </a:solidFill>
-                <a:latin typeface="Courier New" pitchFamily="49" charset="0"/>
-                <a:cs typeface="Courier New" pitchFamily="49" charset="0"/>
-              </a:rPr>
-              <a:t>n;</a:t>
-            </a:r>
-            <a:endParaRPr lang="de-DE" sz="2000" b="1" dirty="0">
-              <a:solidFill>
-                <a:schemeClr val="tx1"/>
-              </a:solidFill>
-              <a:latin typeface="Courier New" pitchFamily="49" charset="0"/>
-              <a:cs typeface="Courier New" pitchFamily="49" charset="0"/>
-            </a:endParaRPr>
+              <a:t>max_n;</a:t>
+            </a:r>
           </a:p>
           <a:p>
             <a:pPr>
@@ -23742,7 +23648,7 @@
         </p:nvSpPr>
         <p:spPr>
           <a:xfrm>
-            <a:off x="970071" y="2267613"/>
+            <a:off x="1038651" y="2267613"/>
             <a:ext cx="4220238" cy="400110"/>
           </a:xfrm>
           <a:prstGeom prst="rect">
@@ -23850,8 +23756,8 @@
         </p:nvSpPr>
         <p:spPr>
           <a:xfrm>
-            <a:off x="970071" y="2803245"/>
-            <a:ext cx="7060473" cy="400110"/>
+            <a:off x="1038651" y="2803245"/>
+            <a:ext cx="6436569" cy="400110"/>
           </a:xfrm>
           <a:prstGeom prst="rect">
             <a:avLst/>
@@ -35320,8 +35226,40 @@
               <a:buChar char="n"/>
             </a:pPr>
             <a:r>
-              <a:rPr lang="en-US" sz="2800" dirty="0"/>
-              <a:t>Post-Lecture Diagnostic Quiz</a:t>
+              <a:rPr lang="en-US" sz="2400" dirty="0"/>
+              <a:t>Diagnostic Quizzes</a:t>
+            </a:r>
+          </a:p>
+          <a:p>
+            <a:pPr marL="800100" lvl="1" indent="-342900">
+              <a:spcBef>
+                <a:spcPts val="1200"/>
+              </a:spcBef>
+              <a:buClr>
+                <a:schemeClr val="accent4">
+                  <a:lumMod val="60000"/>
+                  <a:lumOff val="40000"/>
+                </a:schemeClr>
+              </a:buClr>
+              <a:buSzPct val="75000"/>
+              <a:buFont typeface="Wingdings" pitchFamily="2" charset="2"/>
+              <a:buChar char="n"/>
+            </a:pPr>
+            <a:r>
+              <a:rPr lang="en-US" sz="2000" dirty="0"/>
+              <a:t>Lecture 8: due </a:t>
+            </a:r>
+            <a:r>
+              <a:rPr lang="en-US" sz="2000" dirty="0">
+                <a:solidFill>
+                  <a:srgbClr val="0000FF"/>
+                </a:solidFill>
+              </a:rPr>
+              <a:t>20 Mar, 2pm </a:t>
+            </a:r>
+            <a:r>
+              <a:rPr lang="en-US" sz="2000" dirty="0"/>
+              <a:t>(extended due to PE1)</a:t>
             </a:r>
           </a:p>
           <a:p>
@@ -35358,13 +35296,8 @@
             </a:pPr>
             <a:r>
               <a:rPr lang="en-US" sz="2800" dirty="0"/>
-              <a:t>Problem </a:t>
-            </a:r>
-            <a:r>
-              <a:rPr lang="en-US" sz="2800"/>
-              <a:t>Set 15-17</a:t>
-            </a:r>
-            <a:endParaRPr lang="en-US" sz="2800" dirty="0"/>
+              <a:t>Problem Set 15-17</a:t>
+            </a:r>
           </a:p>
           <a:p>
             <a:pPr marL="342900" indent="-342900">
@@ -35400,11 +35333,55 @@
             </a:pPr>
             <a:r>
               <a:rPr lang="en-US" sz="2800" dirty="0"/>
-              <a:t>Exercise 4</a:t>
-            </a:r>
-          </a:p>
-          <a:p>
-            <a:pPr marL="342900" indent="-342900">
+              <a:t>Exercises</a:t>
+            </a:r>
+          </a:p>
+          <a:p>
+            <a:pPr marL="800100" lvl="1" indent="-342900">
+              <a:spcBef>
+                <a:spcPts val="1200"/>
+              </a:spcBef>
+              <a:buClr>
+                <a:schemeClr val="accent4">
+                  <a:lumMod val="60000"/>
+                  <a:lumOff val="40000"/>
+                </a:schemeClr>
+              </a:buClr>
+              <a:buSzPct val="75000"/>
+              <a:buFont typeface="Wingdings" pitchFamily="2" charset="2"/>
+              <a:buChar char="n"/>
+            </a:pPr>
+            <a:r>
+              <a:rPr lang="en-US" sz="2000" dirty="0"/>
+              <a:t>Exercise 4 due </a:t>
+            </a:r>
+            <a:r>
+              <a:rPr lang="en-US" sz="2000" dirty="0">
+                <a:solidFill>
+                  <a:srgbClr val="0000FF"/>
+                </a:solidFill>
+              </a:rPr>
+              <a:t>20</a:t>
+            </a:r>
+            <a:r>
+              <a:rPr lang="en-US" sz="2000" dirty="0"/>
+              <a:t> </a:t>
+            </a:r>
+            <a:r>
+              <a:rPr lang="en-US" sz="2000" dirty="0">
+                <a:solidFill>
+                  <a:srgbClr val="0000FF"/>
+                </a:solidFill>
+              </a:rPr>
+              <a:t>Mar, 2pm </a:t>
+            </a:r>
+            <a:r>
+              <a:rPr lang="en-US" sz="2000" dirty="0"/>
+              <a:t>(extended due to PE1)</a:t>
+            </a:r>
+          </a:p>
+          <a:p>
+            <a:pPr marL="800100" lvl="1" indent="-342900">
               <a:spcBef>
                 <a:spcPts val="1200"/>
               </a:spcBef>
@@ -35956,7 +35933,27 @@
                 <a:latin typeface="Courier New" panose="02070309020205020404" pitchFamily="49" charset="0"/>
                 <a:cs typeface="Courier New" panose="02070309020205020404" pitchFamily="49" charset="0"/>
               </a:rPr>
-              <a:t> main() {</a:t>
+              <a:t> main(</a:t>
+            </a:r>
+            <a:r>
+              <a:rPr lang="en-US" b="1" dirty="0">
+                <a:solidFill>
+                  <a:srgbClr val="0000FF"/>
+                </a:solidFill>
+                <a:latin typeface="Courier New" panose="02070309020205020404" pitchFamily="49" charset="0"/>
+                <a:cs typeface="Courier New" panose="02070309020205020404" pitchFamily="49" charset="0"/>
+              </a:rPr>
+              <a:t>void</a:t>
+            </a:r>
+            <a:r>
+              <a:rPr lang="en-US" b="1" dirty="0">
+                <a:solidFill>
+                  <a:schemeClr val="tx1"/>
+                </a:solidFill>
+                <a:latin typeface="Courier New" panose="02070309020205020404" pitchFamily="49" charset="0"/>
+                <a:cs typeface="Courier New" panose="02070309020205020404" pitchFamily="49" charset="0"/>
+              </a:rPr>
+              <a:t>) {</a:t>
             </a:r>
           </a:p>
           <a:p>
@@ -41872,7 +41869,27 @@
                 <a:latin typeface="Courier New" panose="02070309020205020404" pitchFamily="49" charset="0"/>
                 <a:cs typeface="Courier New" panose="02070309020205020404" pitchFamily="49" charset="0"/>
               </a:rPr>
-              <a:t> = NULL;</a:t>
+              <a:t> = </a:t>
+            </a:r>
+            <a:r>
+              <a:rPr lang="en-US" b="1" dirty="0">
+                <a:solidFill>
+                  <a:srgbClr val="C00000"/>
+                </a:solidFill>
+                <a:latin typeface="Courier New" panose="02070309020205020404" pitchFamily="49" charset="0"/>
+                <a:cs typeface="Courier New" panose="02070309020205020404" pitchFamily="49" charset="0"/>
+              </a:rPr>
+              <a:t>NULL</a:t>
+            </a:r>
+            <a:r>
+              <a:rPr lang="en-US" b="1" dirty="0">
+                <a:solidFill>
+                  <a:schemeClr val="tx1"/>
+                </a:solidFill>
+                <a:latin typeface="Courier New" panose="02070309020205020404" pitchFamily="49" charset="0"/>
+                <a:cs typeface="Courier New" panose="02070309020205020404" pitchFamily="49" charset="0"/>
+              </a:rPr>
+              <a:t>;</a:t>
             </a:r>
           </a:p>
         </p:txBody>
@@ -43066,6 +43083,330 @@
   <p:transition>
     <p:fade/>
   </p:transition>
+  <p:timing>
+    <p:tnLst>
+      <p:par>
+        <p:cTn id="1" dur="indefinite" restart="never" nodeType="tmRoot">
+          <p:childTnLst>
+            <p:seq concurrent="1" nextAc="seek">
+              <p:cTn id="2" dur="indefinite" nodeType="mainSeq">
+                <p:childTnLst>
+                  <p:par>
+                    <p:cTn id="3" fill="hold">
+                      <p:stCondLst>
+                        <p:cond delay="indefinite"/>
+                      </p:stCondLst>
+                      <p:childTnLst>
+                        <p:par>
+                          <p:cTn id="4" fill="hold">
+                            <p:stCondLst>
+                              <p:cond delay="0"/>
+                            </p:stCondLst>
+                            <p:childTnLst>
+                              <p:par>
+                                <p:cTn id="5" presetID="1" presetClass="entr" presetSubtype="0" fill="hold" grpId="0" nodeType="clickEffect">
+                                  <p:stCondLst>
+                                    <p:cond delay="0"/>
+                                  </p:stCondLst>
+                                  <p:childTnLst>
+                                    <p:set>
+                                      <p:cBhvr>
+                                        <p:cTn id="6" dur="1" fill="hold">
+                                          <p:stCondLst>
+                                            <p:cond delay="0"/>
+                                          </p:stCondLst>
+                                        </p:cTn>
+                                        <p:tgtEl>
+                                          <p:spTgt spid="11"/>
+                                        </p:tgtEl>
+                                        <p:attrNameLst>
+                                          <p:attrName>style.visibility</p:attrName>
+                                        </p:attrNameLst>
+                                      </p:cBhvr>
+                                      <p:to>
+                                        <p:strVal val="visible"/>
+                                      </p:to>
+                                    </p:set>
+                                  </p:childTnLst>
+                                </p:cTn>
+                              </p:par>
+                            </p:childTnLst>
+                          </p:cTn>
+                        </p:par>
+                      </p:childTnLst>
+                    </p:cTn>
+                  </p:par>
+                  <p:par>
+                    <p:cTn id="7" fill="hold">
+                      <p:stCondLst>
+                        <p:cond delay="indefinite"/>
+                      </p:stCondLst>
+                      <p:childTnLst>
+                        <p:par>
+                          <p:cTn id="8" fill="hold">
+                            <p:stCondLst>
+                              <p:cond delay="0"/>
+                            </p:stCondLst>
+                            <p:childTnLst>
+                              <p:par>
+                                <p:cTn id="9" presetID="1" presetClass="entr" presetSubtype="0" fill="hold" nodeType="clickEffect">
+                                  <p:stCondLst>
+                                    <p:cond delay="0"/>
+                                  </p:stCondLst>
+                                  <p:childTnLst>
+                                    <p:set>
+                                      <p:cBhvr>
+                                        <p:cTn id="10" dur="1" fill="hold">
+                                          <p:stCondLst>
+                                            <p:cond delay="0"/>
+                                          </p:stCondLst>
+                                        </p:cTn>
+                                        <p:tgtEl>
+                                          <p:spTgt spid="9">
+                                            <p:txEl>
+                                              <p:pRg st="4" end="4"/>
+                                            </p:txEl>
+                                          </p:spTgt>
+                                        </p:tgtEl>
+                                        <p:attrNameLst>
+                                          <p:attrName>style.visibility</p:attrName>
+                                        </p:attrNameLst>
+                                      </p:cBhvr>
+                                      <p:to>
+                                        <p:strVal val="visible"/>
+                                      </p:to>
+                                    </p:set>
+                                  </p:childTnLst>
+                                </p:cTn>
+                              </p:par>
+                              <p:par>
+                                <p:cTn id="11" presetID="1" presetClass="entr" presetSubtype="0" fill="hold" grpId="0" nodeType="withEffect">
+                                  <p:stCondLst>
+                                    <p:cond delay="0"/>
+                                  </p:stCondLst>
+                                  <p:childTnLst>
+                                    <p:set>
+                                      <p:cBhvr>
+                                        <p:cTn id="12" dur="1" fill="hold">
+                                          <p:stCondLst>
+                                            <p:cond delay="0"/>
+                                          </p:stCondLst>
+                                        </p:cTn>
+                                        <p:tgtEl>
+                                          <p:spTgt spid="14"/>
+                                        </p:tgtEl>
+                                        <p:attrNameLst>
+                                          <p:attrName>style.visibility</p:attrName>
+                                        </p:attrNameLst>
+                                      </p:cBhvr>
+                                      <p:to>
+                                        <p:strVal val="visible"/>
+                                      </p:to>
+                                    </p:set>
+                                  </p:childTnLst>
+                                </p:cTn>
+                              </p:par>
+                            </p:childTnLst>
+                          </p:cTn>
+                        </p:par>
+                      </p:childTnLst>
+                    </p:cTn>
+                  </p:par>
+                  <p:par>
+                    <p:cTn id="13" fill="hold">
+                      <p:stCondLst>
+                        <p:cond delay="indefinite"/>
+                      </p:stCondLst>
+                      <p:childTnLst>
+                        <p:par>
+                          <p:cTn id="14" fill="hold">
+                            <p:stCondLst>
+                              <p:cond delay="0"/>
+                            </p:stCondLst>
+                            <p:childTnLst>
+                              <p:par>
+                                <p:cTn id="15" presetID="1" presetClass="entr" presetSubtype="0" fill="hold" grpId="0" nodeType="clickEffect">
+                                  <p:stCondLst>
+                                    <p:cond delay="0"/>
+                                  </p:stCondLst>
+                                  <p:childTnLst>
+                                    <p:set>
+                                      <p:cBhvr>
+                                        <p:cTn id="16" dur="1" fill="hold">
+                                          <p:stCondLst>
+                                            <p:cond delay="0"/>
+                                          </p:stCondLst>
+                                        </p:cTn>
+                                        <p:tgtEl>
+                                          <p:spTgt spid="15"/>
+                                        </p:tgtEl>
+                                        <p:attrNameLst>
+                                          <p:attrName>style.visibility</p:attrName>
+                                        </p:attrNameLst>
+                                      </p:cBhvr>
+                                      <p:to>
+                                        <p:strVal val="visible"/>
+                                      </p:to>
+                                    </p:set>
+                                  </p:childTnLst>
+                                </p:cTn>
+                              </p:par>
+                            </p:childTnLst>
+                          </p:cTn>
+                        </p:par>
+                      </p:childTnLst>
+                    </p:cTn>
+                  </p:par>
+                  <p:par>
+                    <p:cTn id="17" fill="hold">
+                      <p:stCondLst>
+                        <p:cond delay="indefinite"/>
+                      </p:stCondLst>
+                      <p:childTnLst>
+                        <p:par>
+                          <p:cTn id="18" fill="hold">
+                            <p:stCondLst>
+                              <p:cond delay="0"/>
+                            </p:stCondLst>
+                            <p:childTnLst>
+                              <p:par>
+                                <p:cTn id="19" presetID="1" presetClass="entr" presetSubtype="0" fill="hold" nodeType="clickEffect">
+                                  <p:stCondLst>
+                                    <p:cond delay="0"/>
+                                  </p:stCondLst>
+                                  <p:childTnLst>
+                                    <p:set>
+                                      <p:cBhvr>
+                                        <p:cTn id="20" dur="1" fill="hold">
+                                          <p:stCondLst>
+                                            <p:cond delay="0"/>
+                                          </p:stCondLst>
+                                        </p:cTn>
+                                        <p:tgtEl>
+                                          <p:spTgt spid="9">
+                                            <p:txEl>
+                                              <p:pRg st="7" end="7"/>
+                                            </p:txEl>
+                                          </p:spTgt>
+                                        </p:tgtEl>
+                                        <p:attrNameLst>
+                                          <p:attrName>style.visibility</p:attrName>
+                                        </p:attrNameLst>
+                                      </p:cBhvr>
+                                      <p:to>
+                                        <p:strVal val="visible"/>
+                                      </p:to>
+                                    </p:set>
+                                  </p:childTnLst>
+                                </p:cTn>
+                              </p:par>
+                              <p:par>
+                                <p:cTn id="21" presetID="1" presetClass="entr" presetSubtype="0" fill="hold" grpId="0" nodeType="withEffect">
+                                  <p:stCondLst>
+                                    <p:cond delay="0"/>
+                                  </p:stCondLst>
+                                  <p:childTnLst>
+                                    <p:set>
+                                      <p:cBhvr>
+                                        <p:cTn id="22" dur="1" fill="hold">
+                                          <p:stCondLst>
+                                            <p:cond delay="0"/>
+                                          </p:stCondLst>
+                                        </p:cTn>
+                                        <p:tgtEl>
+                                          <p:spTgt spid="16"/>
+                                        </p:tgtEl>
+                                        <p:attrNameLst>
+                                          <p:attrName>style.visibility</p:attrName>
+                                        </p:attrNameLst>
+                                      </p:cBhvr>
+                                      <p:to>
+                                        <p:strVal val="visible"/>
+                                      </p:to>
+                                    </p:set>
+                                  </p:childTnLst>
+                                </p:cTn>
+                              </p:par>
+                            </p:childTnLst>
+                          </p:cTn>
+                        </p:par>
+                      </p:childTnLst>
+                    </p:cTn>
+                  </p:par>
+                  <p:par>
+                    <p:cTn id="23" fill="hold">
+                      <p:stCondLst>
+                        <p:cond delay="indefinite"/>
+                      </p:stCondLst>
+                      <p:childTnLst>
+                        <p:par>
+                          <p:cTn id="24" fill="hold">
+                            <p:stCondLst>
+                              <p:cond delay="0"/>
+                            </p:stCondLst>
+                            <p:childTnLst>
+                              <p:par>
+                                <p:cTn id="25" presetID="1" presetClass="entr" presetSubtype="0" fill="hold" grpId="0" nodeType="clickEffect">
+                                  <p:stCondLst>
+                                    <p:cond delay="0"/>
+                                  </p:stCondLst>
+                                  <p:childTnLst>
+                                    <p:set>
+                                      <p:cBhvr>
+                                        <p:cTn id="26" dur="1" fill="hold">
+                                          <p:stCondLst>
+                                            <p:cond delay="0"/>
+                                          </p:stCondLst>
+                                        </p:cTn>
+                                        <p:tgtEl>
+                                          <p:spTgt spid="17"/>
+                                        </p:tgtEl>
+                                        <p:attrNameLst>
+                                          <p:attrName>style.visibility</p:attrName>
+                                        </p:attrNameLst>
+                                      </p:cBhvr>
+                                      <p:to>
+                                        <p:strVal val="visible"/>
+                                      </p:to>
+                                    </p:set>
+                                  </p:childTnLst>
+                                </p:cTn>
+                              </p:par>
+                            </p:childTnLst>
+                          </p:cTn>
+                        </p:par>
+                      </p:childTnLst>
+                    </p:cTn>
+                  </p:par>
+                </p:childTnLst>
+              </p:cTn>
+              <p:prevCondLst>
+                <p:cond evt="onPrev" delay="0">
+                  <p:tgtEl>
+                    <p:sldTgt/>
+                  </p:tgtEl>
+                </p:cond>
+              </p:prevCondLst>
+              <p:nextCondLst>
+                <p:cond evt="onNext" delay="0">
+                  <p:tgtEl>
+                    <p:sldTgt/>
+                  </p:tgtEl>
+                </p:cond>
+              </p:nextCondLst>
+            </p:seq>
+          </p:childTnLst>
+        </p:cTn>
+      </p:par>
+    </p:tnLst>
+    <p:bldLst>
+      <p:bldP spid="11" grpId="0" animBg="1"/>
+      <p:bldP spid="14" grpId="0" animBg="1"/>
+      <p:bldP spid="15" grpId="0" animBg="1"/>
+      <p:bldP spid="16" grpId="0" animBg="1"/>
+      <p:bldP spid="17" grpId="0" animBg="1"/>
+    </p:bldLst>
+  </p:timing>
 </p:sld>
 </file>
 
